--- a/docs/gavel-architecture.pptx
+++ b/docs/gavel-architecture.pptx
@@ -574,7 +574,7 @@
           <a:lstStyle/>
           <a:p>
             <a:r>
-              <a:t>Built and checked by machines too. Devin wrote PRs, Quality Clouds scanned the repo, Galtea scored the chair across five dimensions, Langfuse traced every model call.</a:t>
+              <a:t>Built and checked by machines too. Devin wrote PRs, Quality Clouds scanned the repo, Galtea scored the chair, Langfuse traced every model call.</a:t>
             </a:r>
           </a:p>
         </p:txBody>
@@ -644,7 +644,7 @@
           <a:lstStyle/>
           <a:p>
             <a:r>
-              <a:t>Discord was the demo. Teams is the product. One container knows what a voice call is. Company rules set once and enforced everywhere, and a hand-off plugin that pushes the transcript, decisions and open items into the team's own knowledge agent.</a:t>
+              <a:t>Discord was the demo. Teams is the product. Company rules set once, and a hand-off plugin that pushes the transcript, decisions and open items into the team's own agent.</a:t>
             </a:r>
           </a:p>
         </p:txBody>
@@ -3643,6 +3643,14 @@
 <file path=ppt/slides/slide1.xml><?xml version="1.0" encoding="utf-8"?>
 <p:sld xmlns:a="http://schemas.openxmlformats.org/drawingml/2006/main" xmlns:p="http://schemas.openxmlformats.org/presentationml/2006/main" xmlns:r="http://schemas.openxmlformats.org/officeDocument/2006/relationships">
   <p:cSld>
+    <p:bg>
+      <p:bgPr>
+        <a:solidFill>
+          <a:srgbClr val="FBFBFD"/>
+        </a:solidFill>
+        <a:effectLst/>
+      </p:bgPr>
+    </p:bg>
     <p:spTree>
       <p:nvGrpSpPr>
         <p:cNvPr id="1" name=""/>
@@ -3650,9 +3658,153 @@
         <p:nvPr/>
       </p:nvGrpSpPr>
       <p:grpSpPr/>
+      <p:sp>
+        <p:nvSpPr>
+          <p:cNvPr id="2" name="Rounded Rectangle 1"/>
+          <p:cNvSpPr/>
+          <p:nvPr/>
+        </p:nvSpPr>
+        <p:spPr>
+          <a:xfrm>
+            <a:off x="1727200" y="1324967"/>
+            <a:ext cx="3031132" cy="4600475"/>
+          </a:xfrm>
+          <a:prstGeom prst="roundRect">
+            <a:avLst>
+              <a:gd name="adj" fmla="val 4189"/>
+            </a:avLst>
+          </a:prstGeom>
+          <a:solidFill>
+            <a:srgbClr val="FFFFFF"/>
+          </a:solidFill>
+          <a:ln w="9525">
+            <a:solidFill>
+              <a:srgbClr val="E4E4EA"/>
+            </a:solidFill>
+          </a:ln>
+          <a:effectLst/>
+        </p:spPr>
+        <p:style>
+          <a:lnRef idx="1">
+            <a:schemeClr val="accent1"/>
+          </a:lnRef>
+          <a:fillRef idx="3">
+            <a:schemeClr val="accent1"/>
+          </a:fillRef>
+          <a:effectRef idx="2">
+            <a:schemeClr val="accent1"/>
+          </a:effectRef>
+          <a:fontRef idx="minor">
+            <a:schemeClr val="lt1"/>
+          </a:fontRef>
+        </p:style>
+        <p:txBody>
+          <a:bodyPr rtlCol="0" anchor="ctr"/>
+          <a:lstStyle/>
+          <a:p>
+            <a:pPr algn="ctr"/>
+          </a:p>
+        </p:txBody>
+      </p:sp>
+      <p:sp>
+        <p:nvSpPr>
+          <p:cNvPr id="3" name="Rounded Rectangle 2"/>
+          <p:cNvSpPr/>
+          <p:nvPr/>
+        </p:nvSpPr>
+        <p:spPr>
+          <a:xfrm>
+            <a:off x="5221783" y="1324967"/>
+            <a:ext cx="3031132" cy="4600475"/>
+          </a:xfrm>
+          <a:prstGeom prst="roundRect">
+            <a:avLst>
+              <a:gd name="adj" fmla="val 4189"/>
+            </a:avLst>
+          </a:prstGeom>
+          <a:solidFill>
+            <a:srgbClr val="FFFFFF"/>
+          </a:solidFill>
+          <a:ln w="9525">
+            <a:solidFill>
+              <a:srgbClr val="E4E4EA"/>
+            </a:solidFill>
+          </a:ln>
+          <a:effectLst/>
+        </p:spPr>
+        <p:style>
+          <a:lnRef idx="1">
+            <a:schemeClr val="accent1"/>
+          </a:lnRef>
+          <a:fillRef idx="3">
+            <a:schemeClr val="accent1"/>
+          </a:fillRef>
+          <a:effectRef idx="2">
+            <a:schemeClr val="accent1"/>
+          </a:effectRef>
+          <a:fontRef idx="minor">
+            <a:schemeClr val="lt1"/>
+          </a:fontRef>
+        </p:style>
+        <p:txBody>
+          <a:bodyPr rtlCol="0" anchor="ctr"/>
+          <a:lstStyle/>
+          <a:p>
+            <a:pPr algn="ctr"/>
+          </a:p>
+        </p:txBody>
+      </p:sp>
+      <p:sp>
+        <p:nvSpPr>
+          <p:cNvPr id="4" name="Rounded Rectangle 3"/>
+          <p:cNvSpPr/>
+          <p:nvPr/>
+        </p:nvSpPr>
+        <p:spPr>
+          <a:xfrm>
+            <a:off x="8716367" y="1324967"/>
+            <a:ext cx="3031132" cy="4600475"/>
+          </a:xfrm>
+          <a:prstGeom prst="roundRect">
+            <a:avLst>
+              <a:gd name="adj" fmla="val 4189"/>
+            </a:avLst>
+          </a:prstGeom>
+          <a:solidFill>
+            <a:srgbClr val="FFFFFF"/>
+          </a:solidFill>
+          <a:ln w="9525">
+            <a:solidFill>
+              <a:srgbClr val="E4E4EA"/>
+            </a:solidFill>
+          </a:ln>
+          <a:effectLst/>
+        </p:spPr>
+        <p:style>
+          <a:lnRef idx="1">
+            <a:schemeClr val="accent1"/>
+          </a:lnRef>
+          <a:fillRef idx="3">
+            <a:schemeClr val="accent1"/>
+          </a:fillRef>
+          <a:effectRef idx="2">
+            <a:schemeClr val="accent1"/>
+          </a:effectRef>
+          <a:fontRef idx="minor">
+            <a:schemeClr val="lt1"/>
+          </a:fontRef>
+        </p:style>
+        <p:txBody>
+          <a:bodyPr rtlCol="0" anchor="ctr"/>
+          <a:lstStyle/>
+          <a:p>
+            <a:pPr algn="ctr"/>
+          </a:p>
+        </p:txBody>
+      </p:sp>
       <p:pic>
         <p:nvPicPr>
-          <p:cNvPr id="2" name="Picture 1" descr="deck-1.png"/>
+          <p:cNvPr id="5" name="Picture 4" descr="deck-glyphs-1.png"/>
           <p:cNvPicPr>
             <a:picLocks noChangeAspect="1"/>
           </p:cNvPicPr>
@@ -3674,6 +3826,1194 @@
           </a:prstGeom>
         </p:spPr>
       </p:pic>
+      <p:sp>
+        <p:nvSpPr>
+          <p:cNvPr id="6" name="TextBox 5"/>
+          <p:cNvSpPr txBox="1"/>
+          <p:nvPr/>
+        </p:nvSpPr>
+        <p:spPr>
+          <a:xfrm>
+            <a:off x="444500" y="288032"/>
+            <a:ext cx="11493500" cy="195579"/>
+          </a:xfrm>
+          <a:prstGeom prst="rect">
+            <a:avLst/>
+          </a:prstGeom>
+          <a:noFill/>
+        </p:spPr>
+        <p:txBody>
+          <a:bodyPr wrap="none" lIns="0" rIns="0" tIns="0" bIns="0" anchor="t">
+            <a:spAutoFit/>
+          </a:bodyPr>
+          <a:lstStyle/>
+          <a:p>
+            <a:pPr algn="l">
+              <a:lnSpc>
+                <a:spcPct val="150000"/>
+              </a:lnSpc>
+            </a:pPr>
+            <a:r>
+              <a:rPr sz="980" b="0" spc="308">
+                <a:solidFill>
+                  <a:srgbClr val="6E6E73"/>
+                </a:solidFill>
+                <a:latin typeface="Helvetica Neue"/>
+              </a:rPr>
+              <a:t>GAVEL</a:t>
+            </a:r>
+          </a:p>
+        </p:txBody>
+      </p:sp>
+      <p:sp>
+        <p:nvSpPr>
+          <p:cNvPr id="7" name="TextBox 6"/>
+          <p:cNvSpPr txBox="1"/>
+          <p:nvPr/>
+        </p:nvSpPr>
+        <p:spPr>
+          <a:xfrm>
+            <a:off x="444500" y="524470"/>
+            <a:ext cx="11493500" cy="640794"/>
+          </a:xfrm>
+          <a:prstGeom prst="rect">
+            <a:avLst/>
+          </a:prstGeom>
+          <a:noFill/>
+        </p:spPr>
+        <p:txBody>
+          <a:bodyPr wrap="none" lIns="0" rIns="0" tIns="0" bIns="0" anchor="t">
+            <a:spAutoFit/>
+          </a:bodyPr>
+          <a:lstStyle/>
+          <a:p>
+            <a:pPr algn="l">
+              <a:lnSpc>
+                <a:spcPct val="104000"/>
+              </a:lnSpc>
+            </a:pPr>
+            <a:r>
+              <a:rPr sz="4060" b="1" spc="-145">
+                <a:solidFill>
+                  <a:srgbClr val="1D1D1F"/>
+                </a:solidFill>
+                <a:latin typeface="Helvetica Neue"/>
+              </a:rPr>
+              <a:t>Karen sits </a:t>
+            </a:r>
+            <a:r>
+              <a:rPr sz="4060" b="1" spc="-145">
+                <a:solidFill>
+                  <a:srgbClr val="0071E3"/>
+                </a:solidFill>
+                <a:latin typeface="Helvetica Neue"/>
+              </a:rPr>
+              <a:t>in the call</a:t>
+            </a:r>
+            <a:r>
+              <a:rPr sz="4060" b="1" spc="-145">
+                <a:solidFill>
+                  <a:srgbClr val="1D1D1F"/>
+                </a:solidFill>
+                <a:latin typeface="Helvetica Neue"/>
+              </a:rPr>
+              <a:t>.</a:t>
+            </a:r>
+          </a:p>
+        </p:txBody>
+      </p:sp>
+      <p:sp>
+        <p:nvSpPr>
+          <p:cNvPr id="8" name="TextBox 7"/>
+          <p:cNvSpPr txBox="1"/>
+          <p:nvPr/>
+        </p:nvSpPr>
+        <p:spPr>
+          <a:xfrm>
+            <a:off x="444500" y="974129"/>
+            <a:ext cx="11493500" cy="293370"/>
+          </a:xfrm>
+          <a:prstGeom prst="rect">
+            <a:avLst/>
+          </a:prstGeom>
+          <a:noFill/>
+        </p:spPr>
+        <p:txBody>
+          <a:bodyPr wrap="none" lIns="0" rIns="0" tIns="0" bIns="0" anchor="t">
+            <a:spAutoFit/>
+          </a:bodyPr>
+          <a:lstStyle/>
+          <a:p>
+            <a:pPr algn="l">
+              <a:lnSpc>
+                <a:spcPct val="150000"/>
+              </a:lnSpc>
+            </a:pPr>
+            <a:r>
+              <a:rPr sz="1470" b="0">
+                <a:solidFill>
+                  <a:srgbClr val="6E6E73"/>
+                </a:solidFill>
+                <a:latin typeface="Helvetica Neue"/>
+              </a:rPr>
+              <a:t>Hears everyone. Decides in code. Speaks up.</a:t>
+            </a:r>
+          </a:p>
+        </p:txBody>
+      </p:sp>
+      <p:sp>
+        <p:nvSpPr>
+          <p:cNvPr id="9" name="TextBox 8"/>
+          <p:cNvSpPr txBox="1"/>
+          <p:nvPr/>
+        </p:nvSpPr>
+        <p:spPr>
+          <a:xfrm>
+            <a:off x="809724" y="4001392"/>
+            <a:ext cx="880179" cy="265430"/>
+          </a:xfrm>
+          <a:prstGeom prst="rect">
+            <a:avLst/>
+          </a:prstGeom>
+          <a:noFill/>
+        </p:spPr>
+        <p:txBody>
+          <a:bodyPr wrap="none" lIns="0" rIns="0" tIns="0" bIns="0" anchor="t">
+            <a:spAutoFit/>
+          </a:bodyPr>
+          <a:lstStyle/>
+          <a:p>
+            <a:pPr algn="l">
+              <a:lnSpc>
+                <a:spcPct val="150000"/>
+              </a:lnSpc>
+            </a:pPr>
+            <a:r>
+              <a:rPr sz="1330" b="1">
+                <a:solidFill>
+                  <a:srgbClr val="1D1D1F"/>
+                </a:solidFill>
+                <a:latin typeface="Helvetica Neue"/>
+              </a:rPr>
+              <a:t>Karen</a:t>
+            </a:r>
+          </a:p>
+        </p:txBody>
+      </p:sp>
+      <p:sp>
+        <p:nvSpPr>
+          <p:cNvPr id="10" name="TextBox 9"/>
+          <p:cNvSpPr txBox="1"/>
+          <p:nvPr/>
+        </p:nvSpPr>
+        <p:spPr>
+          <a:xfrm>
+            <a:off x="690264" y="4245867"/>
+            <a:ext cx="1270625" cy="195579"/>
+          </a:xfrm>
+          <a:prstGeom prst="rect">
+            <a:avLst/>
+          </a:prstGeom>
+          <a:noFill/>
+        </p:spPr>
+        <p:txBody>
+          <a:bodyPr wrap="none" lIns="0" rIns="0" tIns="0" bIns="0" anchor="t">
+            <a:spAutoFit/>
+          </a:bodyPr>
+          <a:lstStyle/>
+          <a:p>
+            <a:pPr algn="l">
+              <a:lnSpc>
+                <a:spcPct val="150000"/>
+              </a:lnSpc>
+            </a:pPr>
+            <a:r>
+              <a:rPr sz="980" b="0" spc="196">
+                <a:solidFill>
+                  <a:srgbClr val="6E6E73"/>
+                </a:solidFill>
+                <a:latin typeface="Helvetica Neue"/>
+              </a:rPr>
+              <a:t>THE CHAIR</a:t>
+            </a:r>
+          </a:p>
+        </p:txBody>
+      </p:sp>
+      <p:sp>
+        <p:nvSpPr>
+          <p:cNvPr id="11" name="TextBox 10"/>
+          <p:cNvSpPr txBox="1"/>
+          <p:nvPr/>
+        </p:nvSpPr>
+        <p:spPr>
+          <a:xfrm>
+            <a:off x="1924050" y="2384623"/>
+            <a:ext cx="5227022" cy="237490"/>
+          </a:xfrm>
+          <a:prstGeom prst="rect">
+            <a:avLst/>
+          </a:prstGeom>
+          <a:noFill/>
+        </p:spPr>
+        <p:txBody>
+          <a:bodyPr wrap="none" lIns="0" rIns="0" tIns="0" bIns="0" anchor="t">
+            <a:spAutoFit/>
+          </a:bodyPr>
+          <a:lstStyle/>
+          <a:p>
+            <a:pPr algn="l">
+              <a:lnSpc>
+                <a:spcPct val="150000"/>
+              </a:lnSpc>
+            </a:pPr>
+            <a:r>
+              <a:rPr sz="1190" b="1" spc="340">
+                <a:solidFill>
+                  <a:srgbClr val="087443"/>
+                </a:solidFill>
+                <a:latin typeface="Helvetica Neue"/>
+              </a:rPr>
+              <a:t>HEAR</a:t>
+            </a:r>
+          </a:p>
+        </p:txBody>
+      </p:sp>
+      <p:sp>
+        <p:nvSpPr>
+          <p:cNvPr id="12" name="TextBox 11"/>
+          <p:cNvSpPr txBox="1"/>
+          <p:nvPr/>
+        </p:nvSpPr>
+        <p:spPr>
+          <a:xfrm>
+            <a:off x="2355850" y="3077467"/>
+            <a:ext cx="1409263" cy="363220"/>
+          </a:xfrm>
+          <a:prstGeom prst="rect">
+            <a:avLst/>
+          </a:prstGeom>
+          <a:noFill/>
+        </p:spPr>
+        <p:txBody>
+          <a:bodyPr wrap="none" lIns="0" rIns="0" tIns="0" bIns="0" anchor="t">
+            <a:spAutoFit/>
+          </a:bodyPr>
+          <a:lstStyle/>
+          <a:p>
+            <a:pPr algn="l">
+              <a:lnSpc>
+                <a:spcPct val="150000"/>
+              </a:lnSpc>
+            </a:pPr>
+            <a:r>
+              <a:rPr sz="1820" b="1" spc="-26">
+                <a:solidFill>
+                  <a:srgbClr val="1D1D1F"/>
+                </a:solidFill>
+                <a:latin typeface="Helvetica Neue"/>
+              </a:rPr>
+              <a:t>Discord</a:t>
+            </a:r>
+          </a:p>
+        </p:txBody>
+      </p:sp>
+      <p:sp>
+        <p:nvSpPr>
+          <p:cNvPr id="13" name="TextBox 12"/>
+          <p:cNvSpPr txBox="1"/>
+          <p:nvPr/>
+        </p:nvSpPr>
+        <p:spPr>
+          <a:xfrm>
+            <a:off x="2355850" y="3331467"/>
+            <a:ext cx="1307663" cy="251460"/>
+          </a:xfrm>
+          <a:prstGeom prst="rect">
+            <a:avLst/>
+          </a:prstGeom>
+          <a:noFill/>
+        </p:spPr>
+        <p:txBody>
+          <a:bodyPr wrap="none" lIns="0" rIns="0" tIns="0" bIns="0" anchor="t">
+            <a:spAutoFit/>
+          </a:bodyPr>
+          <a:lstStyle/>
+          <a:p>
+            <a:pPr algn="l">
+              <a:lnSpc>
+                <a:spcPct val="150000"/>
+              </a:lnSpc>
+            </a:pPr>
+            <a:r>
+              <a:rPr sz="1260" b="0" spc="36">
+                <a:solidFill>
+                  <a:srgbClr val="6E6E73"/>
+                </a:solidFill>
+                <a:latin typeface="Helvetica Neue"/>
+              </a:rPr>
+              <a:t>the call</a:t>
+            </a:r>
+          </a:p>
+        </p:txBody>
+      </p:sp>
+      <p:sp>
+        <p:nvSpPr>
+          <p:cNvPr id="14" name="TextBox 13"/>
+          <p:cNvSpPr txBox="1"/>
+          <p:nvPr/>
+        </p:nvSpPr>
+        <p:spPr>
+          <a:xfrm>
+            <a:off x="2355850" y="4033837"/>
+            <a:ext cx="1762918" cy="363220"/>
+          </a:xfrm>
+          <a:prstGeom prst="rect">
+            <a:avLst/>
+          </a:prstGeom>
+          <a:noFill/>
+        </p:spPr>
+        <p:txBody>
+          <a:bodyPr wrap="none" lIns="0" rIns="0" tIns="0" bIns="0" anchor="t">
+            <a:spAutoFit/>
+          </a:bodyPr>
+          <a:lstStyle/>
+          <a:p>
+            <a:pPr algn="l">
+              <a:lnSpc>
+                <a:spcPct val="150000"/>
+              </a:lnSpc>
+            </a:pPr>
+            <a:r>
+              <a:rPr sz="1820" b="1" spc="-26">
+                <a:solidFill>
+                  <a:srgbClr val="1D1D1F"/>
+                </a:solidFill>
+                <a:latin typeface="Helvetica Neue"/>
+              </a:rPr>
+              <a:t>SLNG</a:t>
+            </a:r>
+          </a:p>
+        </p:txBody>
+      </p:sp>
+      <p:sp>
+        <p:nvSpPr>
+          <p:cNvPr id="15" name="TextBox 14"/>
+          <p:cNvSpPr txBox="1"/>
+          <p:nvPr/>
+        </p:nvSpPr>
+        <p:spPr>
+          <a:xfrm>
+            <a:off x="2355850" y="4287837"/>
+            <a:ext cx="1661318" cy="251460"/>
+          </a:xfrm>
+          <a:prstGeom prst="rect">
+            <a:avLst/>
+          </a:prstGeom>
+          <a:noFill/>
+        </p:spPr>
+        <p:txBody>
+          <a:bodyPr wrap="none" lIns="0" rIns="0" tIns="0" bIns="0" anchor="t">
+            <a:spAutoFit/>
+          </a:bodyPr>
+          <a:lstStyle/>
+          <a:p>
+            <a:pPr algn="l">
+              <a:lnSpc>
+                <a:spcPct val="150000"/>
+              </a:lnSpc>
+            </a:pPr>
+            <a:r>
+              <a:rPr sz="1260" b="0" spc="36">
+                <a:solidFill>
+                  <a:srgbClr val="6E6E73"/>
+                </a:solidFill>
+                <a:latin typeface="Helvetica Neue"/>
+              </a:rPr>
+              <a:t>speech → text</a:t>
+            </a:r>
+          </a:p>
+        </p:txBody>
+      </p:sp>
+      <p:sp>
+        <p:nvSpPr>
+          <p:cNvPr id="16" name="TextBox 15"/>
+          <p:cNvSpPr txBox="1"/>
+          <p:nvPr/>
+        </p:nvSpPr>
+        <p:spPr>
+          <a:xfrm>
+            <a:off x="2787650" y="4990107"/>
+            <a:ext cx="2549971" cy="363220"/>
+          </a:xfrm>
+          <a:prstGeom prst="rect">
+            <a:avLst/>
+          </a:prstGeom>
+          <a:noFill/>
+        </p:spPr>
+        <p:txBody>
+          <a:bodyPr wrap="none" lIns="0" rIns="0" tIns="0" bIns="0" anchor="t">
+            <a:spAutoFit/>
+          </a:bodyPr>
+          <a:lstStyle/>
+          <a:p>
+            <a:pPr algn="l">
+              <a:lnSpc>
+                <a:spcPct val="150000"/>
+              </a:lnSpc>
+            </a:pPr>
+            <a:r>
+              <a:rPr sz="1820" b="1" spc="-26">
+                <a:solidFill>
+                  <a:srgbClr val="1D1D1F"/>
+                </a:solidFill>
+                <a:latin typeface="Helvetica Neue"/>
+              </a:rPr>
+              <a:t>Postgres · Redis</a:t>
+            </a:r>
+          </a:p>
+        </p:txBody>
+      </p:sp>
+      <p:sp>
+        <p:nvSpPr>
+          <p:cNvPr id="17" name="TextBox 16"/>
+          <p:cNvSpPr txBox="1"/>
+          <p:nvPr/>
+        </p:nvSpPr>
+        <p:spPr>
+          <a:xfrm>
+            <a:off x="2787650" y="5244107"/>
+            <a:ext cx="2448371" cy="251460"/>
+          </a:xfrm>
+          <a:prstGeom prst="rect">
+            <a:avLst/>
+          </a:prstGeom>
+          <a:noFill/>
+        </p:spPr>
+        <p:txBody>
+          <a:bodyPr wrap="none" lIns="0" rIns="0" tIns="0" bIns="0" anchor="t">
+            <a:spAutoFit/>
+          </a:bodyPr>
+          <a:lstStyle/>
+          <a:p>
+            <a:pPr algn="l">
+              <a:lnSpc>
+                <a:spcPct val="150000"/>
+              </a:lnSpc>
+            </a:pPr>
+            <a:r>
+              <a:rPr sz="1260" b="0" spc="36">
+                <a:solidFill>
+                  <a:srgbClr val="6E6E73"/>
+                </a:solidFill>
+                <a:latin typeface="Helvetica Neue"/>
+              </a:rPr>
+              <a:t>memory</a:t>
+            </a:r>
+          </a:p>
+        </p:txBody>
+      </p:sp>
+      <p:sp>
+        <p:nvSpPr>
+          <p:cNvPr id="18" name="TextBox 17"/>
+          <p:cNvSpPr txBox="1"/>
+          <p:nvPr/>
+        </p:nvSpPr>
+        <p:spPr>
+          <a:xfrm>
+            <a:off x="4885332" y="3510855"/>
+            <a:ext cx="855156" cy="388620"/>
+          </a:xfrm>
+          <a:prstGeom prst="rect">
+            <a:avLst/>
+          </a:prstGeom>
+          <a:noFill/>
+        </p:spPr>
+        <p:txBody>
+          <a:bodyPr wrap="none" lIns="0" rIns="0" tIns="0" bIns="0" anchor="t">
+            <a:spAutoFit/>
+          </a:bodyPr>
+          <a:lstStyle/>
+          <a:p>
+            <a:pPr algn="l">
+              <a:lnSpc>
+                <a:spcPct val="100000"/>
+              </a:lnSpc>
+            </a:pPr>
+            <a:r>
+              <a:rPr sz="2520" b="0">
+                <a:solidFill>
+                  <a:srgbClr val="C2C6D2"/>
+                </a:solidFill>
+                <a:latin typeface="Helvetica Neue"/>
+              </a:rPr>
+              <a:t>→</a:t>
+            </a:r>
+          </a:p>
+        </p:txBody>
+      </p:sp>
+      <p:sp>
+        <p:nvSpPr>
+          <p:cNvPr id="19" name="TextBox 18"/>
+          <p:cNvSpPr txBox="1"/>
+          <p:nvPr/>
+        </p:nvSpPr>
+        <p:spPr>
+          <a:xfrm>
+            <a:off x="5418633" y="2384623"/>
+            <a:ext cx="5227022" cy="237490"/>
+          </a:xfrm>
+          <a:prstGeom prst="rect">
+            <a:avLst/>
+          </a:prstGeom>
+          <a:noFill/>
+        </p:spPr>
+        <p:txBody>
+          <a:bodyPr wrap="none" lIns="0" rIns="0" tIns="0" bIns="0" anchor="t">
+            <a:spAutoFit/>
+          </a:bodyPr>
+          <a:lstStyle/>
+          <a:p>
+            <a:pPr algn="l">
+              <a:lnSpc>
+                <a:spcPct val="150000"/>
+              </a:lnSpc>
+            </a:pPr>
+            <a:r>
+              <a:rPr sz="1190" b="1" spc="340">
+                <a:solidFill>
+                  <a:srgbClr val="0071E3"/>
+                </a:solidFill>
+                <a:latin typeface="Helvetica Neue"/>
+              </a:rPr>
+              <a:t>THINK</a:t>
+            </a:r>
+          </a:p>
+        </p:txBody>
+      </p:sp>
+      <p:sp>
+        <p:nvSpPr>
+          <p:cNvPr id="20" name="TextBox 19"/>
+          <p:cNvSpPr txBox="1"/>
+          <p:nvPr/>
+        </p:nvSpPr>
+        <p:spPr>
+          <a:xfrm>
+            <a:off x="5850433" y="3077467"/>
+            <a:ext cx="1700143" cy="363220"/>
+          </a:xfrm>
+          <a:prstGeom prst="rect">
+            <a:avLst/>
+          </a:prstGeom>
+          <a:noFill/>
+        </p:spPr>
+        <p:txBody>
+          <a:bodyPr wrap="none" lIns="0" rIns="0" tIns="0" bIns="0" anchor="t">
+            <a:spAutoFit/>
+          </a:bodyPr>
+          <a:lstStyle/>
+          <a:p>
+            <a:pPr algn="l">
+              <a:lnSpc>
+                <a:spcPct val="150000"/>
+              </a:lnSpc>
+            </a:pPr>
+            <a:r>
+              <a:rPr sz="1820" b="1" spc="-26">
+                <a:solidFill>
+                  <a:srgbClr val="1D1D1F"/>
+                </a:solidFill>
+                <a:latin typeface="Helvetica Neue"/>
+              </a:rPr>
+              <a:t>Rules</a:t>
+            </a:r>
+          </a:p>
+        </p:txBody>
+      </p:sp>
+      <p:sp>
+        <p:nvSpPr>
+          <p:cNvPr id="21" name="TextBox 20"/>
+          <p:cNvSpPr txBox="1"/>
+          <p:nvPr/>
+        </p:nvSpPr>
+        <p:spPr>
+          <a:xfrm>
+            <a:off x="5850433" y="3331467"/>
+            <a:ext cx="1598543" cy="251460"/>
+          </a:xfrm>
+          <a:prstGeom prst="rect">
+            <a:avLst/>
+          </a:prstGeom>
+          <a:noFill/>
+        </p:spPr>
+        <p:txBody>
+          <a:bodyPr wrap="none" lIns="0" rIns="0" tIns="0" bIns="0" anchor="t">
+            <a:spAutoFit/>
+          </a:bodyPr>
+          <a:lstStyle/>
+          <a:p>
+            <a:pPr algn="l">
+              <a:lnSpc>
+                <a:spcPct val="150000"/>
+              </a:lnSpc>
+            </a:pPr>
+            <a:r>
+              <a:rPr sz="1260" b="0" spc="36">
+                <a:solidFill>
+                  <a:srgbClr val="6E6E73"/>
+                </a:solidFill>
+                <a:latin typeface="Helvetica Neue"/>
+              </a:rPr>
+              <a:t>every 250 ms</a:t>
+            </a:r>
+          </a:p>
+        </p:txBody>
+      </p:sp>
+      <p:sp>
+        <p:nvSpPr>
+          <p:cNvPr id="22" name="TextBox 21"/>
+          <p:cNvSpPr txBox="1"/>
+          <p:nvPr/>
+        </p:nvSpPr>
+        <p:spPr>
+          <a:xfrm>
+            <a:off x="5850433" y="4033837"/>
+            <a:ext cx="1300301" cy="363220"/>
+          </a:xfrm>
+          <a:prstGeom prst="rect">
+            <a:avLst/>
+          </a:prstGeom>
+          <a:noFill/>
+        </p:spPr>
+        <p:txBody>
+          <a:bodyPr wrap="none" lIns="0" rIns="0" tIns="0" bIns="0" anchor="t">
+            <a:spAutoFit/>
+          </a:bodyPr>
+          <a:lstStyle/>
+          <a:p>
+            <a:pPr algn="l">
+              <a:lnSpc>
+                <a:spcPct val="150000"/>
+              </a:lnSpc>
+            </a:pPr>
+            <a:r>
+              <a:rPr sz="1820" b="1" spc="-26">
+                <a:solidFill>
+                  <a:srgbClr val="1D1D1F"/>
+                </a:solidFill>
+                <a:latin typeface="Helvetica Neue"/>
+              </a:rPr>
+              <a:t>Mastra</a:t>
+            </a:r>
+          </a:p>
+        </p:txBody>
+      </p:sp>
+      <p:sp>
+        <p:nvSpPr>
+          <p:cNvPr id="23" name="TextBox 22"/>
+          <p:cNvSpPr txBox="1"/>
+          <p:nvPr/>
+        </p:nvSpPr>
+        <p:spPr>
+          <a:xfrm>
+            <a:off x="5850433" y="4287837"/>
+            <a:ext cx="1198701" cy="251460"/>
+          </a:xfrm>
+          <a:prstGeom prst="rect">
+            <a:avLst/>
+          </a:prstGeom>
+          <a:noFill/>
+        </p:spPr>
+        <p:txBody>
+          <a:bodyPr wrap="none" lIns="0" rIns="0" tIns="0" bIns="0" anchor="t">
+            <a:spAutoFit/>
+          </a:bodyPr>
+          <a:lstStyle/>
+          <a:p>
+            <a:pPr algn="l">
+              <a:lnSpc>
+                <a:spcPct val="150000"/>
+              </a:lnSpc>
+            </a:pPr>
+            <a:r>
+              <a:rPr sz="1260" b="0" spc="36">
+                <a:solidFill>
+                  <a:srgbClr val="6E6E73"/>
+                </a:solidFill>
+                <a:latin typeface="Helvetica Neue"/>
+              </a:rPr>
+              <a:t>the agent</a:t>
+            </a:r>
+          </a:p>
+        </p:txBody>
+      </p:sp>
+      <p:sp>
+        <p:nvSpPr>
+          <p:cNvPr id="24" name="TextBox 23"/>
+          <p:cNvSpPr txBox="1"/>
+          <p:nvPr/>
+        </p:nvSpPr>
+        <p:spPr>
+          <a:xfrm>
+            <a:off x="5850433" y="4990107"/>
+            <a:ext cx="1326693" cy="363220"/>
+          </a:xfrm>
+          <a:prstGeom prst="rect">
+            <a:avLst/>
+          </a:prstGeom>
+          <a:noFill/>
+        </p:spPr>
+        <p:txBody>
+          <a:bodyPr wrap="none" lIns="0" rIns="0" tIns="0" bIns="0" anchor="t">
+            <a:spAutoFit/>
+          </a:bodyPr>
+          <a:lstStyle/>
+          <a:p>
+            <a:pPr algn="l">
+              <a:lnSpc>
+                <a:spcPct val="150000"/>
+              </a:lnSpc>
+            </a:pPr>
+            <a:r>
+              <a:rPr sz="1820" b="1" spc="-26">
+                <a:solidFill>
+                  <a:srgbClr val="1D1D1F"/>
+                </a:solidFill>
+                <a:latin typeface="Helvetica Neue"/>
+              </a:rPr>
+              <a:t>Nebius</a:t>
+            </a:r>
+          </a:p>
+        </p:txBody>
+      </p:sp>
+      <p:sp>
+        <p:nvSpPr>
+          <p:cNvPr id="25" name="TextBox 24"/>
+          <p:cNvSpPr txBox="1"/>
+          <p:nvPr/>
+        </p:nvSpPr>
+        <p:spPr>
+          <a:xfrm>
+            <a:off x="5850433" y="5244107"/>
+            <a:ext cx="1225093" cy="251460"/>
+          </a:xfrm>
+          <a:prstGeom prst="rect">
+            <a:avLst/>
+          </a:prstGeom>
+          <a:noFill/>
+        </p:spPr>
+        <p:txBody>
+          <a:bodyPr wrap="none" lIns="0" rIns="0" tIns="0" bIns="0" anchor="t">
+            <a:spAutoFit/>
+          </a:bodyPr>
+          <a:lstStyle/>
+          <a:p>
+            <a:pPr algn="l">
+              <a:lnSpc>
+                <a:spcPct val="150000"/>
+              </a:lnSpc>
+            </a:pPr>
+            <a:r>
+              <a:rPr sz="1260" b="0" spc="36">
+                <a:solidFill>
+                  <a:srgbClr val="6E6E73"/>
+                </a:solidFill>
+                <a:latin typeface="Helvetica Neue"/>
+              </a:rPr>
+              <a:t>the words</a:t>
+            </a:r>
+          </a:p>
+        </p:txBody>
+      </p:sp>
+      <p:sp>
+        <p:nvSpPr>
+          <p:cNvPr id="26" name="TextBox 25"/>
+          <p:cNvSpPr txBox="1"/>
+          <p:nvPr/>
+        </p:nvSpPr>
+        <p:spPr>
+          <a:xfrm>
+            <a:off x="8379916" y="3510855"/>
+            <a:ext cx="855156" cy="388620"/>
+          </a:xfrm>
+          <a:prstGeom prst="rect">
+            <a:avLst/>
+          </a:prstGeom>
+          <a:noFill/>
+        </p:spPr>
+        <p:txBody>
+          <a:bodyPr wrap="none" lIns="0" rIns="0" tIns="0" bIns="0" anchor="t">
+            <a:spAutoFit/>
+          </a:bodyPr>
+          <a:lstStyle/>
+          <a:p>
+            <a:pPr algn="l">
+              <a:lnSpc>
+                <a:spcPct val="100000"/>
+              </a:lnSpc>
+            </a:pPr>
+            <a:r>
+              <a:rPr sz="2520" b="0">
+                <a:solidFill>
+                  <a:srgbClr val="C2C6D2"/>
+                </a:solidFill>
+                <a:latin typeface="Helvetica Neue"/>
+              </a:rPr>
+              <a:t>→</a:t>
+            </a:r>
+          </a:p>
+        </p:txBody>
+      </p:sp>
+      <p:sp>
+        <p:nvSpPr>
+          <p:cNvPr id="27" name="TextBox 26"/>
+          <p:cNvSpPr txBox="1"/>
+          <p:nvPr/>
+        </p:nvSpPr>
+        <p:spPr>
+          <a:xfrm>
+            <a:off x="8913217" y="2384623"/>
+            <a:ext cx="3024782" cy="237490"/>
+          </a:xfrm>
+          <a:prstGeom prst="rect">
+            <a:avLst/>
+          </a:prstGeom>
+          <a:noFill/>
+        </p:spPr>
+        <p:txBody>
+          <a:bodyPr wrap="none" lIns="0" rIns="0" tIns="0" bIns="0" anchor="t">
+            <a:spAutoFit/>
+          </a:bodyPr>
+          <a:lstStyle/>
+          <a:p>
+            <a:pPr algn="l">
+              <a:lnSpc>
+                <a:spcPct val="150000"/>
+              </a:lnSpc>
+            </a:pPr>
+            <a:r>
+              <a:rPr sz="1190" b="1" spc="340">
+                <a:solidFill>
+                  <a:srgbClr val="B25000"/>
+                </a:solidFill>
+                <a:latin typeface="Helvetica Neue"/>
+              </a:rPr>
+              <a:t>SPEAK</a:t>
+            </a:r>
+          </a:p>
+        </p:txBody>
+      </p:sp>
+      <p:sp>
+        <p:nvSpPr>
+          <p:cNvPr id="28" name="TextBox 27"/>
+          <p:cNvSpPr txBox="1"/>
+          <p:nvPr/>
+        </p:nvSpPr>
+        <p:spPr>
+          <a:xfrm>
+            <a:off x="9345017" y="3077467"/>
+            <a:ext cx="1762918" cy="363220"/>
+          </a:xfrm>
+          <a:prstGeom prst="rect">
+            <a:avLst/>
+          </a:prstGeom>
+          <a:noFill/>
+        </p:spPr>
+        <p:txBody>
+          <a:bodyPr wrap="none" lIns="0" rIns="0" tIns="0" bIns="0" anchor="t">
+            <a:spAutoFit/>
+          </a:bodyPr>
+          <a:lstStyle/>
+          <a:p>
+            <a:pPr algn="l">
+              <a:lnSpc>
+                <a:spcPct val="150000"/>
+              </a:lnSpc>
+            </a:pPr>
+            <a:r>
+              <a:rPr sz="1820" b="1" spc="-26">
+                <a:solidFill>
+                  <a:srgbClr val="1D1D1F"/>
+                </a:solidFill>
+                <a:latin typeface="Helvetica Neue"/>
+              </a:rPr>
+              <a:t>SLNG</a:t>
+            </a:r>
+          </a:p>
+        </p:txBody>
+      </p:sp>
+      <p:sp>
+        <p:nvSpPr>
+          <p:cNvPr id="29" name="TextBox 28"/>
+          <p:cNvSpPr txBox="1"/>
+          <p:nvPr/>
+        </p:nvSpPr>
+        <p:spPr>
+          <a:xfrm>
+            <a:off x="9345017" y="3331467"/>
+            <a:ext cx="1661318" cy="251460"/>
+          </a:xfrm>
+          <a:prstGeom prst="rect">
+            <a:avLst/>
+          </a:prstGeom>
+          <a:noFill/>
+        </p:spPr>
+        <p:txBody>
+          <a:bodyPr wrap="none" lIns="0" rIns="0" tIns="0" bIns="0" anchor="t">
+            <a:spAutoFit/>
+          </a:bodyPr>
+          <a:lstStyle/>
+          <a:p>
+            <a:pPr algn="l">
+              <a:lnSpc>
+                <a:spcPct val="150000"/>
+              </a:lnSpc>
+            </a:pPr>
+            <a:r>
+              <a:rPr sz="1260" b="0" spc="36">
+                <a:solidFill>
+                  <a:srgbClr val="6E6E73"/>
+                </a:solidFill>
+                <a:latin typeface="Helvetica Neue"/>
+              </a:rPr>
+              <a:t>text → speech</a:t>
+            </a:r>
+          </a:p>
+        </p:txBody>
+      </p:sp>
+      <p:sp>
+        <p:nvSpPr>
+          <p:cNvPr id="30" name="TextBox 29"/>
+          <p:cNvSpPr txBox="1"/>
+          <p:nvPr/>
+        </p:nvSpPr>
+        <p:spPr>
+          <a:xfrm>
+            <a:off x="9345017" y="4033837"/>
+            <a:ext cx="1154013" cy="363220"/>
+          </a:xfrm>
+          <a:prstGeom prst="rect">
+            <a:avLst/>
+          </a:prstGeom>
+          <a:noFill/>
+        </p:spPr>
+        <p:txBody>
+          <a:bodyPr wrap="none" lIns="0" rIns="0" tIns="0" bIns="0" anchor="t">
+            <a:spAutoFit/>
+          </a:bodyPr>
+          <a:lstStyle/>
+          <a:p>
+            <a:pPr algn="l">
+              <a:lnSpc>
+                <a:spcPct val="150000"/>
+              </a:lnSpc>
+            </a:pPr>
+            <a:r>
+              <a:rPr sz="1820" b="1" spc="-26">
+                <a:solidFill>
+                  <a:srgbClr val="1D1D1F"/>
+                </a:solidFill>
+                <a:latin typeface="Helvetica Neue"/>
+              </a:rPr>
+              <a:t>fal</a:t>
+            </a:r>
+          </a:p>
+        </p:txBody>
+      </p:sp>
+      <p:sp>
+        <p:nvSpPr>
+          <p:cNvPr id="31" name="TextBox 30"/>
+          <p:cNvSpPr txBox="1"/>
+          <p:nvPr/>
+        </p:nvSpPr>
+        <p:spPr>
+          <a:xfrm>
+            <a:off x="9345017" y="4287837"/>
+            <a:ext cx="1052413" cy="251460"/>
+          </a:xfrm>
+          <a:prstGeom prst="rect">
+            <a:avLst/>
+          </a:prstGeom>
+          <a:noFill/>
+        </p:spPr>
+        <p:txBody>
+          <a:bodyPr wrap="none" lIns="0" rIns="0" tIns="0" bIns="0" anchor="t">
+            <a:spAutoFit/>
+          </a:bodyPr>
+          <a:lstStyle/>
+          <a:p>
+            <a:pPr algn="l">
+              <a:lnSpc>
+                <a:spcPct val="150000"/>
+              </a:lnSpc>
+            </a:pPr>
+            <a:r>
+              <a:rPr sz="1260" b="0" spc="36">
+                <a:solidFill>
+                  <a:srgbClr val="6E6E73"/>
+                </a:solidFill>
+                <a:latin typeface="Helvetica Neue"/>
+              </a:rPr>
+              <a:t>her face</a:t>
+            </a:r>
+          </a:p>
+        </p:txBody>
+      </p:sp>
+      <p:sp>
+        <p:nvSpPr>
+          <p:cNvPr id="32" name="TextBox 31"/>
+          <p:cNvSpPr txBox="1"/>
+          <p:nvPr/>
+        </p:nvSpPr>
+        <p:spPr>
+          <a:xfrm>
+            <a:off x="9345017" y="4990107"/>
+            <a:ext cx="1391165" cy="363220"/>
+          </a:xfrm>
+          <a:prstGeom prst="rect">
+            <a:avLst/>
+          </a:prstGeom>
+          <a:noFill/>
+        </p:spPr>
+        <p:txBody>
+          <a:bodyPr wrap="none" lIns="0" rIns="0" tIns="0" bIns="0" anchor="t">
+            <a:spAutoFit/>
+          </a:bodyPr>
+          <a:lstStyle/>
+          <a:p>
+            <a:pPr algn="l">
+              <a:lnSpc>
+                <a:spcPct val="150000"/>
+              </a:lnSpc>
+            </a:pPr>
+            <a:r>
+              <a:rPr sz="1820" b="1" spc="-26">
+                <a:solidFill>
+                  <a:srgbClr val="1D1D1F"/>
+                </a:solidFill>
+                <a:latin typeface="Helvetica Neue"/>
+              </a:rPr>
+              <a:t>Vonage</a:t>
+            </a:r>
+          </a:p>
+        </p:txBody>
+      </p:sp>
+      <p:sp>
+        <p:nvSpPr>
+          <p:cNvPr id="33" name="TextBox 32"/>
+          <p:cNvSpPr txBox="1"/>
+          <p:nvPr/>
+        </p:nvSpPr>
+        <p:spPr>
+          <a:xfrm>
+            <a:off x="9345017" y="5244107"/>
+            <a:ext cx="1289565" cy="251460"/>
+          </a:xfrm>
+          <a:prstGeom prst="rect">
+            <a:avLst/>
+          </a:prstGeom>
+          <a:noFill/>
+        </p:spPr>
+        <p:txBody>
+          <a:bodyPr wrap="none" lIns="0" rIns="0" tIns="0" bIns="0" anchor="t">
+            <a:spAutoFit/>
+          </a:bodyPr>
+          <a:lstStyle/>
+          <a:p>
+            <a:pPr algn="l">
+              <a:lnSpc>
+                <a:spcPct val="150000"/>
+              </a:lnSpc>
+            </a:pPr>
+            <a:r>
+              <a:rPr sz="1260" b="0" spc="36">
+                <a:solidFill>
+                  <a:srgbClr val="6E6E73"/>
+                </a:solidFill>
+                <a:latin typeface="Helvetica Neue"/>
+              </a:rPr>
+              <a:t>the stage</a:t>
+            </a:r>
+          </a:p>
+        </p:txBody>
+      </p:sp>
+      <p:sp>
+        <p:nvSpPr>
+          <p:cNvPr id="34" name="TextBox 33"/>
+          <p:cNvSpPr txBox="1"/>
+          <p:nvPr/>
+        </p:nvSpPr>
+        <p:spPr>
+          <a:xfrm>
+            <a:off x="10515203" y="6130329"/>
+            <a:ext cx="1422796" cy="223520"/>
+          </a:xfrm>
+          <a:prstGeom prst="rect">
+            <a:avLst/>
+          </a:prstGeom>
+          <a:noFill/>
+        </p:spPr>
+        <p:txBody>
+          <a:bodyPr wrap="none" lIns="0" rIns="0" tIns="0" bIns="0" anchor="t">
+            <a:spAutoFit/>
+          </a:bodyPr>
+          <a:lstStyle/>
+          <a:p>
+            <a:pPr algn="l">
+              <a:lnSpc>
+                <a:spcPct val="150000"/>
+              </a:lnSpc>
+            </a:pPr>
+            <a:r>
+              <a:rPr sz="1120" b="0">
+                <a:solidFill>
+                  <a:srgbClr val="6E6E73"/>
+                </a:solidFill>
+                <a:latin typeface="Helvetica Neue"/>
+              </a:rPr>
+              <a:t>back into the same call</a:t>
+            </a:r>
+          </a:p>
+        </p:txBody>
+      </p:sp>
+      <p:sp>
+        <p:nvSpPr>
+          <p:cNvPr id="35" name="TextBox 34"/>
+          <p:cNvSpPr txBox="1"/>
+          <p:nvPr/>
+        </p:nvSpPr>
+        <p:spPr>
+          <a:xfrm>
+            <a:off x="11645900" y="6130329"/>
+            <a:ext cx="292100" cy="223520"/>
+          </a:xfrm>
+          <a:prstGeom prst="rect">
+            <a:avLst/>
+          </a:prstGeom>
+          <a:noFill/>
+        </p:spPr>
+        <p:txBody>
+          <a:bodyPr wrap="none" lIns="0" rIns="0" tIns="0" bIns="0" anchor="t">
+            <a:spAutoFit/>
+          </a:bodyPr>
+          <a:lstStyle/>
+          <a:p>
+            <a:pPr algn="l">
+              <a:lnSpc>
+                <a:spcPct val="150000"/>
+              </a:lnSpc>
+            </a:pPr>
+            <a:r>
+              <a:rPr sz="1120" b="0">
+                <a:solidFill>
+                  <a:srgbClr val="B25000"/>
+                </a:solidFill>
+                <a:latin typeface="Helvetica Neue"/>
+              </a:rPr>
+              <a:t>↩</a:t>
+            </a:r>
+          </a:p>
+        </p:txBody>
+      </p:sp>
     </p:spTree>
   </p:cSld>
   <p:clrMapOvr>
@@ -3685,6 +5025,14 @@
 <file path=ppt/slides/slide2.xml><?xml version="1.0" encoding="utf-8"?>
 <p:sld xmlns:a="http://schemas.openxmlformats.org/drawingml/2006/main" xmlns:p="http://schemas.openxmlformats.org/presentationml/2006/main" xmlns:r="http://schemas.openxmlformats.org/officeDocument/2006/relationships">
   <p:cSld>
+    <p:bg>
+      <p:bgPr>
+        <a:solidFill>
+          <a:srgbClr val="FBFBFD"/>
+        </a:solidFill>
+        <a:effectLst/>
+      </p:bgPr>
+    </p:bg>
     <p:spTree>
       <p:nvGrpSpPr>
         <p:cNvPr id="1" name=""/>
@@ -3692,9 +5040,245 @@
         <p:nvPr/>
       </p:nvGrpSpPr>
       <p:grpSpPr/>
+      <p:sp>
+        <p:nvSpPr>
+          <p:cNvPr id="2" name="Rounded Rectangle 1"/>
+          <p:cNvSpPr/>
+          <p:nvPr/>
+        </p:nvSpPr>
+        <p:spPr>
+          <a:xfrm>
+            <a:off x="444500" y="1324967"/>
+            <a:ext cx="3674467" cy="5053012"/>
+          </a:xfrm>
+          <a:prstGeom prst="roundRect">
+            <a:avLst>
+              <a:gd name="adj" fmla="val 3456"/>
+            </a:avLst>
+          </a:prstGeom>
+          <a:solidFill>
+            <a:srgbClr val="FFFFFF"/>
+          </a:solidFill>
+          <a:ln w="9525">
+            <a:solidFill>
+              <a:srgbClr val="E4E4EA"/>
+            </a:solidFill>
+          </a:ln>
+          <a:effectLst/>
+        </p:spPr>
+        <p:style>
+          <a:lnRef idx="1">
+            <a:schemeClr val="accent1"/>
+          </a:lnRef>
+          <a:fillRef idx="3">
+            <a:schemeClr val="accent1"/>
+          </a:fillRef>
+          <a:effectRef idx="2">
+            <a:schemeClr val="accent1"/>
+          </a:effectRef>
+          <a:fontRef idx="minor">
+            <a:schemeClr val="lt1"/>
+          </a:fontRef>
+        </p:style>
+        <p:txBody>
+          <a:bodyPr rtlCol="0" anchor="ctr"/>
+          <a:lstStyle/>
+          <a:p>
+            <a:pPr algn="ctr"/>
+          </a:p>
+        </p:txBody>
+      </p:sp>
+      <p:sp>
+        <p:nvSpPr>
+          <p:cNvPr id="3" name="Rounded Rectangle 2"/>
+          <p:cNvSpPr/>
+          <p:nvPr/>
+        </p:nvSpPr>
+        <p:spPr>
+          <a:xfrm>
+            <a:off x="4258667" y="1324967"/>
+            <a:ext cx="3674566" cy="5053012"/>
+          </a:xfrm>
+          <a:prstGeom prst="roundRect">
+            <a:avLst>
+              <a:gd name="adj" fmla="val 3456"/>
+            </a:avLst>
+          </a:prstGeom>
+          <a:solidFill>
+            <a:srgbClr val="FFFFFF"/>
+          </a:solidFill>
+          <a:ln w="9525">
+            <a:solidFill>
+              <a:srgbClr val="E4E4EA"/>
+            </a:solidFill>
+          </a:ln>
+          <a:effectLst/>
+        </p:spPr>
+        <p:style>
+          <a:lnRef idx="1">
+            <a:schemeClr val="accent1"/>
+          </a:lnRef>
+          <a:fillRef idx="3">
+            <a:schemeClr val="accent1"/>
+          </a:fillRef>
+          <a:effectRef idx="2">
+            <a:schemeClr val="accent1"/>
+          </a:effectRef>
+          <a:fontRef idx="minor">
+            <a:schemeClr val="lt1"/>
+          </a:fontRef>
+        </p:style>
+        <p:txBody>
+          <a:bodyPr rtlCol="0" anchor="ctr"/>
+          <a:lstStyle/>
+          <a:p>
+            <a:pPr algn="ctr"/>
+          </a:p>
+        </p:txBody>
+      </p:sp>
+      <p:sp>
+        <p:nvSpPr>
+          <p:cNvPr id="4" name="Rounded Rectangle 3"/>
+          <p:cNvSpPr/>
+          <p:nvPr/>
+        </p:nvSpPr>
+        <p:spPr>
+          <a:xfrm>
+            <a:off x="4455517" y="2967136"/>
+            <a:ext cx="3280866" cy="468312"/>
+          </a:xfrm>
+          <a:prstGeom prst="roundRect">
+            <a:avLst>
+              <a:gd name="adj" fmla="val 16271"/>
+            </a:avLst>
+          </a:prstGeom>
+          <a:noFill/>
+          <a:ln w="9525">
+            <a:solidFill>
+              <a:srgbClr val="C9CAD2"/>
+            </a:solidFill>
+          </a:ln>
+          <a:effectLst/>
+        </p:spPr>
+        <p:style>
+          <a:lnRef idx="1">
+            <a:schemeClr val="accent1"/>
+          </a:lnRef>
+          <a:fillRef idx="3">
+            <a:schemeClr val="accent1"/>
+          </a:fillRef>
+          <a:effectRef idx="2">
+            <a:schemeClr val="accent1"/>
+          </a:effectRef>
+          <a:fontRef idx="minor">
+            <a:schemeClr val="lt1"/>
+          </a:fontRef>
+        </p:style>
+        <p:txBody>
+          <a:bodyPr rtlCol="0" anchor="ctr"/>
+          <a:lstStyle/>
+          <a:p>
+            <a:pPr algn="ctr"/>
+          </a:p>
+        </p:txBody>
+      </p:sp>
+      <p:sp>
+        <p:nvSpPr>
+          <p:cNvPr id="5" name="Rounded Rectangle 4"/>
+          <p:cNvSpPr/>
+          <p:nvPr/>
+        </p:nvSpPr>
+        <p:spPr>
+          <a:xfrm>
+            <a:off x="8072933" y="1324967"/>
+            <a:ext cx="3674566" cy="5053012"/>
+          </a:xfrm>
+          <a:prstGeom prst="roundRect">
+            <a:avLst>
+              <a:gd name="adj" fmla="val 3456"/>
+            </a:avLst>
+          </a:prstGeom>
+          <a:solidFill>
+            <a:srgbClr val="FFFFFF"/>
+          </a:solidFill>
+          <a:ln w="9525">
+            <a:solidFill>
+              <a:srgbClr val="E4E4EA"/>
+            </a:solidFill>
+          </a:ln>
+          <a:effectLst/>
+        </p:spPr>
+        <p:style>
+          <a:lnRef idx="1">
+            <a:schemeClr val="accent1"/>
+          </a:lnRef>
+          <a:fillRef idx="3">
+            <a:schemeClr val="accent1"/>
+          </a:fillRef>
+          <a:effectRef idx="2">
+            <a:schemeClr val="accent1"/>
+          </a:effectRef>
+          <a:fontRef idx="minor">
+            <a:schemeClr val="lt1"/>
+          </a:fontRef>
+        </p:style>
+        <p:txBody>
+          <a:bodyPr rtlCol="0" anchor="ctr"/>
+          <a:lstStyle/>
+          <a:p>
+            <a:pPr algn="ctr"/>
+          </a:p>
+        </p:txBody>
+      </p:sp>
+      <p:sp>
+        <p:nvSpPr>
+          <p:cNvPr id="6" name="Rounded Rectangle 5"/>
+          <p:cNvSpPr/>
+          <p:nvPr/>
+        </p:nvSpPr>
+        <p:spPr>
+          <a:xfrm>
+            <a:off x="8269783" y="2967136"/>
+            <a:ext cx="3280866" cy="468312"/>
+          </a:xfrm>
+          <a:prstGeom prst="roundRect">
+            <a:avLst>
+              <a:gd name="adj" fmla="val 16271"/>
+            </a:avLst>
+          </a:prstGeom>
+          <a:noFill/>
+          <a:ln w="9525">
+            <a:solidFill>
+              <a:srgbClr val="C9CAD2"/>
+            </a:solidFill>
+          </a:ln>
+          <a:effectLst/>
+        </p:spPr>
+        <p:style>
+          <a:lnRef idx="1">
+            <a:schemeClr val="accent1"/>
+          </a:lnRef>
+          <a:fillRef idx="3">
+            <a:schemeClr val="accent1"/>
+          </a:fillRef>
+          <a:effectRef idx="2">
+            <a:schemeClr val="accent1"/>
+          </a:effectRef>
+          <a:fontRef idx="minor">
+            <a:schemeClr val="lt1"/>
+          </a:fontRef>
+        </p:style>
+        <p:txBody>
+          <a:bodyPr rtlCol="0" anchor="ctr"/>
+          <a:lstStyle/>
+          <a:p>
+            <a:pPr algn="ctr"/>
+          </a:p>
+        </p:txBody>
+      </p:sp>
       <p:pic>
         <p:nvPicPr>
-          <p:cNvPr id="2" name="Picture 1" descr="deck-2.png"/>
+          <p:cNvPr id="7" name="Picture 6" descr="deck-glyphs-2.png"/>
           <p:cNvPicPr>
             <a:picLocks noChangeAspect="1"/>
           </p:cNvPicPr>
@@ -3716,6 +5300,843 @@
           </a:prstGeom>
         </p:spPr>
       </p:pic>
+      <p:sp>
+        <p:nvSpPr>
+          <p:cNvPr id="8" name="TextBox 7"/>
+          <p:cNvSpPr txBox="1"/>
+          <p:nvPr/>
+        </p:nvSpPr>
+        <p:spPr>
+          <a:xfrm>
+            <a:off x="444500" y="288032"/>
+            <a:ext cx="11493500" cy="195579"/>
+          </a:xfrm>
+          <a:prstGeom prst="rect">
+            <a:avLst/>
+          </a:prstGeom>
+          <a:noFill/>
+        </p:spPr>
+        <p:txBody>
+          <a:bodyPr wrap="none" lIns="0" rIns="0" tIns="0" bIns="0" anchor="t">
+            <a:spAutoFit/>
+          </a:bodyPr>
+          <a:lstStyle/>
+          <a:p>
+            <a:pPr algn="l">
+              <a:lnSpc>
+                <a:spcPct val="150000"/>
+              </a:lnSpc>
+            </a:pPr>
+            <a:r>
+              <a:rPr sz="980" b="0" spc="308">
+                <a:solidFill>
+                  <a:srgbClr val="6E6E73"/>
+                </a:solidFill>
+                <a:latin typeface="Helvetica Neue"/>
+              </a:rPr>
+              <a:t>NOT ON THE LIVE PATH</a:t>
+            </a:r>
+          </a:p>
+        </p:txBody>
+      </p:sp>
+      <p:sp>
+        <p:nvSpPr>
+          <p:cNvPr id="9" name="TextBox 8"/>
+          <p:cNvSpPr txBox="1"/>
+          <p:nvPr/>
+        </p:nvSpPr>
+        <p:spPr>
+          <a:xfrm>
+            <a:off x="444500" y="524470"/>
+            <a:ext cx="11493500" cy="640794"/>
+          </a:xfrm>
+          <a:prstGeom prst="rect">
+            <a:avLst/>
+          </a:prstGeom>
+          <a:noFill/>
+        </p:spPr>
+        <p:txBody>
+          <a:bodyPr wrap="none" lIns="0" rIns="0" tIns="0" bIns="0" anchor="t">
+            <a:spAutoFit/>
+          </a:bodyPr>
+          <a:lstStyle/>
+          <a:p>
+            <a:pPr algn="l">
+              <a:lnSpc>
+                <a:spcPct val="104000"/>
+              </a:lnSpc>
+            </a:pPr>
+            <a:r>
+              <a:rPr sz="4060" b="1" spc="-145">
+                <a:solidFill>
+                  <a:srgbClr val="1D1D1F"/>
+                </a:solidFill>
+                <a:latin typeface="Helvetica Neue"/>
+              </a:rPr>
+              <a:t>Built and </a:t>
+            </a:r>
+            <a:r>
+              <a:rPr sz="4060" b="1" spc="-145">
+                <a:solidFill>
+                  <a:srgbClr val="0071E3"/>
+                </a:solidFill>
+                <a:latin typeface="Helvetica Neue"/>
+              </a:rPr>
+              <a:t>checked</a:t>
+            </a:r>
+            <a:r>
+              <a:rPr sz="4060" b="1" spc="-145">
+                <a:solidFill>
+                  <a:srgbClr val="1D1D1F"/>
+                </a:solidFill>
+                <a:latin typeface="Helvetica Neue"/>
+              </a:rPr>
+              <a:t> by machines too.</a:t>
+            </a:r>
+          </a:p>
+        </p:txBody>
+      </p:sp>
+      <p:sp>
+        <p:nvSpPr>
+          <p:cNvPr id="10" name="TextBox 9"/>
+          <p:cNvSpPr txBox="1"/>
+          <p:nvPr/>
+        </p:nvSpPr>
+        <p:spPr>
+          <a:xfrm>
+            <a:off x="444500" y="974129"/>
+            <a:ext cx="11493500" cy="293370"/>
+          </a:xfrm>
+          <a:prstGeom prst="rect">
+            <a:avLst/>
+          </a:prstGeom>
+          <a:noFill/>
+        </p:spPr>
+        <p:txBody>
+          <a:bodyPr wrap="none" lIns="0" rIns="0" tIns="0" bIns="0" anchor="t">
+            <a:spAutoFit/>
+          </a:bodyPr>
+          <a:lstStyle/>
+          <a:p>
+            <a:pPr algn="l">
+              <a:lnSpc>
+                <a:spcPct val="150000"/>
+              </a:lnSpc>
+            </a:pPr>
+            <a:r>
+              <a:rPr sz="1470" b="0">
+                <a:solidFill>
+                  <a:srgbClr val="6E6E73"/>
+                </a:solidFill>
+                <a:latin typeface="Helvetica Neue"/>
+              </a:rPr>
+              <a:t>Whether to interrupt is plain code. Only her words go to a model — so only her words need evals.</a:t>
+            </a:r>
+          </a:p>
+        </p:txBody>
+      </p:sp>
+      <p:sp>
+        <p:nvSpPr>
+          <p:cNvPr id="11" name="TextBox 10"/>
+          <p:cNvSpPr txBox="1"/>
+          <p:nvPr/>
+        </p:nvSpPr>
+        <p:spPr>
+          <a:xfrm>
+            <a:off x="641350" y="2032496"/>
+            <a:ext cx="6550957" cy="349250"/>
+          </a:xfrm>
+          <a:prstGeom prst="rect">
+            <a:avLst/>
+          </a:prstGeom>
+          <a:noFill/>
+        </p:spPr>
+        <p:txBody>
+          <a:bodyPr wrap="none" lIns="0" rIns="0" tIns="0" bIns="0" anchor="t">
+            <a:spAutoFit/>
+          </a:bodyPr>
+          <a:lstStyle/>
+          <a:p>
+            <a:pPr algn="l">
+              <a:lnSpc>
+                <a:spcPct val="150000"/>
+              </a:lnSpc>
+            </a:pPr>
+            <a:r>
+              <a:rPr sz="1750" b="1" spc="-37">
+                <a:solidFill>
+                  <a:srgbClr val="1D1D1F"/>
+                </a:solidFill>
+                <a:latin typeface="Helvetica Neue"/>
+              </a:rPr>
+              <a:t>Devin</a:t>
+            </a:r>
+          </a:p>
+        </p:txBody>
+      </p:sp>
+      <p:sp>
+        <p:nvSpPr>
+          <p:cNvPr id="12" name="TextBox 11"/>
+          <p:cNvSpPr txBox="1"/>
+          <p:nvPr/>
+        </p:nvSpPr>
+        <p:spPr>
+          <a:xfrm>
+            <a:off x="641350" y="2373411"/>
+            <a:ext cx="6449357" cy="237490"/>
+          </a:xfrm>
+          <a:prstGeom prst="rect">
+            <a:avLst/>
+          </a:prstGeom>
+          <a:noFill/>
+        </p:spPr>
+        <p:txBody>
+          <a:bodyPr wrap="none" lIns="0" rIns="0" tIns="0" bIns="0" anchor="t">
+            <a:spAutoFit/>
+          </a:bodyPr>
+          <a:lstStyle/>
+          <a:p>
+            <a:pPr algn="l">
+              <a:lnSpc>
+                <a:spcPct val="150000"/>
+              </a:lnSpc>
+            </a:pPr>
+            <a:r>
+              <a:rPr sz="1190" b="0">
+                <a:solidFill>
+                  <a:srgbClr val="6E6E73"/>
+                </a:solidFill>
+                <a:latin typeface="Helvetica Neue"/>
+              </a:rPr>
+              <a:t>three PRs, all merged into main</a:t>
+            </a:r>
+          </a:p>
+        </p:txBody>
+      </p:sp>
+      <p:sp>
+        <p:nvSpPr>
+          <p:cNvPr id="13" name="TextBox 12"/>
+          <p:cNvSpPr txBox="1"/>
+          <p:nvPr/>
+        </p:nvSpPr>
+        <p:spPr>
+          <a:xfrm>
+            <a:off x="641350" y="2650827"/>
+            <a:ext cx="435897" cy="202565"/>
+          </a:xfrm>
+          <a:prstGeom prst="rect">
+            <a:avLst/>
+          </a:prstGeom>
+          <a:noFill/>
+        </p:spPr>
+        <p:txBody>
+          <a:bodyPr wrap="none" lIns="0" rIns="0" tIns="0" bIns="0" anchor="t">
+            <a:spAutoFit/>
+          </a:bodyPr>
+          <a:lstStyle/>
+          <a:p>
+            <a:pPr algn="l">
+              <a:lnSpc>
+                <a:spcPct val="150000"/>
+              </a:lnSpc>
+            </a:pPr>
+            <a:r>
+              <a:rPr sz="1190" b="1" spc="-25">
+                <a:solidFill>
+                  <a:srgbClr val="0071E3"/>
+                </a:solidFill>
+                <a:latin typeface="Helvetica Neue"/>
+              </a:rPr>
+              <a:t>#1</a:t>
+            </a:r>
+          </a:p>
+        </p:txBody>
+      </p:sp>
+      <p:sp>
+        <p:nvSpPr>
+          <p:cNvPr id="14" name="TextBox 13"/>
+          <p:cNvSpPr txBox="1"/>
+          <p:nvPr/>
+        </p:nvSpPr>
+        <p:spPr>
+          <a:xfrm>
+            <a:off x="641350" y="2806402"/>
+            <a:ext cx="6423957" cy="209550"/>
+          </a:xfrm>
+          <a:prstGeom prst="rect">
+            <a:avLst/>
+          </a:prstGeom>
+          <a:noFill/>
+        </p:spPr>
+        <p:txBody>
+          <a:bodyPr wrap="none" lIns="0" rIns="0" tIns="0" bIns="0" anchor="t">
+            <a:spAutoFit/>
+          </a:bodyPr>
+          <a:lstStyle/>
+          <a:p>
+            <a:pPr algn="l">
+              <a:lnSpc>
+                <a:spcPct val="150000"/>
+              </a:lnSpc>
+            </a:pPr>
+            <a:r>
+              <a:rPr sz="1050" b="0">
+                <a:solidFill>
+                  <a:srgbClr val="6E6E73"/>
+                </a:solidFill>
+                <a:latin typeface="Helvetica Neue"/>
+              </a:rPr>
+              <a:t>ten frozen cases, offline scorer, results table</a:t>
+            </a:r>
+          </a:p>
+        </p:txBody>
+      </p:sp>
+      <p:sp>
+        <p:nvSpPr>
+          <p:cNvPr id="15" name="TextBox 14"/>
+          <p:cNvSpPr txBox="1"/>
+          <p:nvPr/>
+        </p:nvSpPr>
+        <p:spPr>
+          <a:xfrm>
+            <a:off x="641350" y="3037383"/>
+            <a:ext cx="463609" cy="202565"/>
+          </a:xfrm>
+          <a:prstGeom prst="rect">
+            <a:avLst/>
+          </a:prstGeom>
+          <a:noFill/>
+        </p:spPr>
+        <p:txBody>
+          <a:bodyPr wrap="none" lIns="0" rIns="0" tIns="0" bIns="0" anchor="t">
+            <a:spAutoFit/>
+          </a:bodyPr>
+          <a:lstStyle/>
+          <a:p>
+            <a:pPr algn="l">
+              <a:lnSpc>
+                <a:spcPct val="150000"/>
+              </a:lnSpc>
+            </a:pPr>
+            <a:r>
+              <a:rPr sz="1190" b="1" spc="-25">
+                <a:solidFill>
+                  <a:srgbClr val="0071E3"/>
+                </a:solidFill>
+                <a:latin typeface="Helvetica Neue"/>
+              </a:rPr>
+              <a:t>#2</a:t>
+            </a:r>
+          </a:p>
+        </p:txBody>
+      </p:sp>
+      <p:sp>
+        <p:nvSpPr>
+          <p:cNvPr id="16" name="TextBox 15"/>
+          <p:cNvSpPr txBox="1"/>
+          <p:nvPr/>
+        </p:nvSpPr>
+        <p:spPr>
+          <a:xfrm>
+            <a:off x="641350" y="3192958"/>
+            <a:ext cx="6423957" cy="209550"/>
+          </a:xfrm>
+          <a:prstGeom prst="rect">
+            <a:avLst/>
+          </a:prstGeom>
+          <a:noFill/>
+        </p:spPr>
+        <p:txBody>
+          <a:bodyPr wrap="none" lIns="0" rIns="0" tIns="0" bIns="0" anchor="t">
+            <a:spAutoFit/>
+          </a:bodyPr>
+          <a:lstStyle/>
+          <a:p>
+            <a:pPr algn="l">
+              <a:lnSpc>
+                <a:spcPct val="150000"/>
+              </a:lnSpc>
+            </a:pPr>
+            <a:r>
+              <a:rPr sz="1050" b="0">
+                <a:solidFill>
+                  <a:srgbClr val="6E6E73"/>
+                </a:solidFill>
+                <a:latin typeface="Helvetica Neue"/>
+              </a:rPr>
+              <a:t>RRULE/RDATE/EXDATE expanded in the feed poller</a:t>
+            </a:r>
+          </a:p>
+        </p:txBody>
+      </p:sp>
+      <p:sp>
+        <p:nvSpPr>
+          <p:cNvPr id="17" name="TextBox 16"/>
+          <p:cNvSpPr txBox="1"/>
+          <p:nvPr/>
+        </p:nvSpPr>
+        <p:spPr>
+          <a:xfrm>
+            <a:off x="641350" y="3423939"/>
+            <a:ext cx="468699" cy="202565"/>
+          </a:xfrm>
+          <a:prstGeom prst="rect">
+            <a:avLst/>
+          </a:prstGeom>
+          <a:noFill/>
+        </p:spPr>
+        <p:txBody>
+          <a:bodyPr wrap="none" lIns="0" rIns="0" tIns="0" bIns="0" anchor="t">
+            <a:spAutoFit/>
+          </a:bodyPr>
+          <a:lstStyle/>
+          <a:p>
+            <a:pPr algn="l">
+              <a:lnSpc>
+                <a:spcPct val="150000"/>
+              </a:lnSpc>
+            </a:pPr>
+            <a:r>
+              <a:rPr sz="1190" b="1" spc="-25">
+                <a:solidFill>
+                  <a:srgbClr val="0071E3"/>
+                </a:solidFill>
+                <a:latin typeface="Helvetica Neue"/>
+              </a:rPr>
+              <a:t>#3</a:t>
+            </a:r>
+          </a:p>
+        </p:txBody>
+      </p:sp>
+      <p:sp>
+        <p:nvSpPr>
+          <p:cNvPr id="18" name="TextBox 17"/>
+          <p:cNvSpPr txBox="1"/>
+          <p:nvPr/>
+        </p:nvSpPr>
+        <p:spPr>
+          <a:xfrm>
+            <a:off x="641350" y="3579514"/>
+            <a:ext cx="6423957" cy="209550"/>
+          </a:xfrm>
+          <a:prstGeom prst="rect">
+            <a:avLst/>
+          </a:prstGeom>
+          <a:noFill/>
+        </p:spPr>
+        <p:txBody>
+          <a:bodyPr wrap="none" lIns="0" rIns="0" tIns="0" bIns="0" anchor="t">
+            <a:spAutoFit/>
+          </a:bodyPr>
+          <a:lstStyle/>
+          <a:p>
+            <a:pPr algn="l">
+              <a:lnSpc>
+                <a:spcPct val="150000"/>
+              </a:lnSpc>
+            </a:pPr>
+            <a:r>
+              <a:rPr sz="1050" b="0">
+                <a:solidFill>
+                  <a:srgbClr val="6E6E73"/>
+                </a:solidFill>
+                <a:latin typeface="Helvetica Neue"/>
+              </a:rPr>
+              <a:t>spoken chair lines fitted to the 20-word budget</a:t>
+            </a:r>
+          </a:p>
+        </p:txBody>
+      </p:sp>
+      <p:sp>
+        <p:nvSpPr>
+          <p:cNvPr id="19" name="TextBox 18"/>
+          <p:cNvSpPr txBox="1"/>
+          <p:nvPr/>
+        </p:nvSpPr>
+        <p:spPr>
+          <a:xfrm>
+            <a:off x="4455517" y="2032496"/>
+            <a:ext cx="6551146" cy="349250"/>
+          </a:xfrm>
+          <a:prstGeom prst="rect">
+            <a:avLst/>
+          </a:prstGeom>
+          <a:noFill/>
+        </p:spPr>
+        <p:txBody>
+          <a:bodyPr wrap="none" lIns="0" rIns="0" tIns="0" bIns="0" anchor="t">
+            <a:spAutoFit/>
+          </a:bodyPr>
+          <a:lstStyle/>
+          <a:p>
+            <a:pPr algn="l">
+              <a:lnSpc>
+                <a:spcPct val="150000"/>
+              </a:lnSpc>
+            </a:pPr>
+            <a:r>
+              <a:rPr sz="1750" b="1" spc="-37">
+                <a:solidFill>
+                  <a:srgbClr val="1D1D1F"/>
+                </a:solidFill>
+                <a:latin typeface="Helvetica Neue"/>
+              </a:rPr>
+              <a:t>Quality Clouds</a:t>
+            </a:r>
+          </a:p>
+        </p:txBody>
+      </p:sp>
+      <p:sp>
+        <p:nvSpPr>
+          <p:cNvPr id="20" name="TextBox 19"/>
+          <p:cNvSpPr txBox="1"/>
+          <p:nvPr/>
+        </p:nvSpPr>
+        <p:spPr>
+          <a:xfrm>
+            <a:off x="4455517" y="2373411"/>
+            <a:ext cx="6449546" cy="237490"/>
+          </a:xfrm>
+          <a:prstGeom prst="rect">
+            <a:avLst/>
+          </a:prstGeom>
+          <a:noFill/>
+        </p:spPr>
+        <p:txBody>
+          <a:bodyPr wrap="none" lIns="0" rIns="0" tIns="0" bIns="0" anchor="t">
+            <a:spAutoFit/>
+          </a:bodyPr>
+          <a:lstStyle/>
+          <a:p>
+            <a:pPr algn="l">
+              <a:lnSpc>
+                <a:spcPct val="150000"/>
+              </a:lnSpc>
+            </a:pPr>
+            <a:r>
+              <a:rPr sz="1190" b="0">
+                <a:solidFill>
+                  <a:srgbClr val="6E6E73"/>
+                </a:solidFill>
+                <a:latin typeface="Helvetica Neue"/>
+              </a:rPr>
+              <a:t>Norma scanned the repo</a:t>
+            </a:r>
+          </a:p>
+        </p:txBody>
+      </p:sp>
+      <p:sp>
+        <p:nvSpPr>
+          <p:cNvPr id="21" name="TextBox 20"/>
+          <p:cNvSpPr txBox="1"/>
+          <p:nvPr/>
+        </p:nvSpPr>
+        <p:spPr>
+          <a:xfrm>
+            <a:off x="4455517" y="2692896"/>
+            <a:ext cx="6462246" cy="251460"/>
+          </a:xfrm>
+          <a:prstGeom prst="rect">
+            <a:avLst/>
+          </a:prstGeom>
+          <a:noFill/>
+        </p:spPr>
+        <p:txBody>
+          <a:bodyPr wrap="none" lIns="0" rIns="0" tIns="0" bIns="0" anchor="t">
+            <a:spAutoFit/>
+          </a:bodyPr>
+          <a:lstStyle/>
+          <a:p>
+            <a:pPr algn="l">
+              <a:lnSpc>
+                <a:spcPct val="150000"/>
+              </a:lnSpc>
+            </a:pPr>
+            <a:r>
+              <a:rPr sz="1260" b="1">
+                <a:solidFill>
+                  <a:srgbClr val="087443"/>
+                </a:solidFill>
+                <a:latin typeface="Helvetica Neue"/>
+              </a:rPr>
+              <a:t>findings fixed</a:t>
+            </a:r>
+          </a:p>
+        </p:txBody>
+      </p:sp>
+      <p:sp>
+        <p:nvSpPr>
+          <p:cNvPr id="22" name="TextBox 21"/>
+          <p:cNvSpPr txBox="1"/>
+          <p:nvPr/>
+        </p:nvSpPr>
+        <p:spPr>
+          <a:xfrm>
+            <a:off x="4563467" y="3048892"/>
+            <a:ext cx="6026636" cy="223520"/>
+          </a:xfrm>
+          <a:prstGeom prst="rect">
+            <a:avLst/>
+          </a:prstGeom>
+          <a:noFill/>
+        </p:spPr>
+        <p:txBody>
+          <a:bodyPr wrap="none" lIns="0" rIns="0" tIns="0" bIns="0" anchor="t">
+            <a:spAutoFit/>
+          </a:bodyPr>
+          <a:lstStyle/>
+          <a:p>
+            <a:pPr algn="l">
+              <a:lnSpc>
+                <a:spcPct val="150000"/>
+              </a:lnSpc>
+            </a:pPr>
+            <a:r>
+              <a:rPr sz="1120" b="1" spc="16">
+                <a:solidFill>
+                  <a:srgbClr val="1D1D1F"/>
+                </a:solidFill>
+                <a:latin typeface="Helvetica Neue"/>
+              </a:rPr>
+              <a:t>What it improved</a:t>
+            </a:r>
+          </a:p>
+        </p:txBody>
+      </p:sp>
+      <p:sp>
+        <p:nvSpPr>
+          <p:cNvPr id="23" name="TextBox 22"/>
+          <p:cNvSpPr txBox="1"/>
+          <p:nvPr/>
+        </p:nvSpPr>
+        <p:spPr>
+          <a:xfrm>
+            <a:off x="4563467" y="3220342"/>
+            <a:ext cx="2260282" cy="185420"/>
+          </a:xfrm>
+          <a:prstGeom prst="rect">
+            <a:avLst/>
+          </a:prstGeom>
+          <a:noFill/>
+        </p:spPr>
+        <p:txBody>
+          <a:bodyPr wrap="none" lIns="0" rIns="0" tIns="0" bIns="0" anchor="t">
+            <a:spAutoFit/>
+          </a:bodyPr>
+          <a:lstStyle/>
+          <a:p>
+            <a:pPr algn="l">
+              <a:lnSpc>
+                <a:spcPct val="150000"/>
+              </a:lnSpc>
+            </a:pPr>
+            <a:r>
+              <a:rPr sz="1120" b="0">
+                <a:solidFill>
+                  <a:srgbClr val="B0B3BE"/>
+                </a:solidFill>
+                <a:latin typeface="Helvetica Neue"/>
+              </a:rPr>
+              <a:t>— fill in before the pitch</a:t>
+            </a:r>
+          </a:p>
+        </p:txBody>
+      </p:sp>
+      <p:sp>
+        <p:nvSpPr>
+          <p:cNvPr id="24" name="TextBox 23"/>
+          <p:cNvSpPr txBox="1"/>
+          <p:nvPr/>
+        </p:nvSpPr>
+        <p:spPr>
+          <a:xfrm>
+            <a:off x="8269783" y="2032496"/>
+            <a:ext cx="3668216" cy="349250"/>
+          </a:xfrm>
+          <a:prstGeom prst="rect">
+            <a:avLst/>
+          </a:prstGeom>
+          <a:noFill/>
+        </p:spPr>
+        <p:txBody>
+          <a:bodyPr wrap="none" lIns="0" rIns="0" tIns="0" bIns="0" anchor="t">
+            <a:spAutoFit/>
+          </a:bodyPr>
+          <a:lstStyle/>
+          <a:p>
+            <a:pPr algn="l">
+              <a:lnSpc>
+                <a:spcPct val="150000"/>
+              </a:lnSpc>
+            </a:pPr>
+            <a:r>
+              <a:rPr sz="1750" b="1" spc="-37">
+                <a:solidFill>
+                  <a:srgbClr val="1D1D1F"/>
+                </a:solidFill>
+                <a:latin typeface="Helvetica Neue"/>
+              </a:rPr>
+              <a:t>Galtea</a:t>
+            </a:r>
+          </a:p>
+        </p:txBody>
+      </p:sp>
+      <p:sp>
+        <p:nvSpPr>
+          <p:cNvPr id="25" name="TextBox 24"/>
+          <p:cNvSpPr txBox="1"/>
+          <p:nvPr/>
+        </p:nvSpPr>
+        <p:spPr>
+          <a:xfrm>
+            <a:off x="8269783" y="2373411"/>
+            <a:ext cx="3668216" cy="237490"/>
+          </a:xfrm>
+          <a:prstGeom prst="rect">
+            <a:avLst/>
+          </a:prstGeom>
+          <a:noFill/>
+        </p:spPr>
+        <p:txBody>
+          <a:bodyPr wrap="none" lIns="0" rIns="0" tIns="0" bIns="0" anchor="t">
+            <a:spAutoFit/>
+          </a:bodyPr>
+          <a:lstStyle/>
+          <a:p>
+            <a:pPr algn="l">
+              <a:lnSpc>
+                <a:spcPct val="150000"/>
+              </a:lnSpc>
+            </a:pPr>
+            <a:r>
+              <a:rPr sz="1190" b="0">
+                <a:solidFill>
+                  <a:srgbClr val="6E6E73"/>
+                </a:solidFill>
+                <a:latin typeface="Helvetica Neue"/>
+              </a:rPr>
+              <a:t>ten frozen cases, traces sent</a:t>
+            </a:r>
+          </a:p>
+        </p:txBody>
+      </p:sp>
+      <p:sp>
+        <p:nvSpPr>
+          <p:cNvPr id="26" name="TextBox 25"/>
+          <p:cNvSpPr txBox="1"/>
+          <p:nvPr/>
+        </p:nvSpPr>
+        <p:spPr>
+          <a:xfrm>
+            <a:off x="8269783" y="2692896"/>
+            <a:ext cx="3668216" cy="251460"/>
+          </a:xfrm>
+          <a:prstGeom prst="rect">
+            <a:avLst/>
+          </a:prstGeom>
+          <a:noFill/>
+        </p:spPr>
+        <p:txBody>
+          <a:bodyPr wrap="none" lIns="0" rIns="0" tIns="0" bIns="0" anchor="t">
+            <a:spAutoFit/>
+          </a:bodyPr>
+          <a:lstStyle/>
+          <a:p>
+            <a:pPr algn="l">
+              <a:lnSpc>
+                <a:spcPct val="150000"/>
+              </a:lnSpc>
+            </a:pPr>
+            <a:r>
+              <a:rPr sz="1260" b="1">
+                <a:solidFill>
+                  <a:srgbClr val="087443"/>
+                </a:solidFill>
+                <a:latin typeface="Helvetica Neue"/>
+              </a:rPr>
+              <a:t>scored, 5 dimensions</a:t>
+            </a:r>
+          </a:p>
+        </p:txBody>
+      </p:sp>
+      <p:sp>
+        <p:nvSpPr>
+          <p:cNvPr id="27" name="TextBox 26"/>
+          <p:cNvSpPr txBox="1"/>
+          <p:nvPr/>
+        </p:nvSpPr>
+        <p:spPr>
+          <a:xfrm>
+            <a:off x="8377733" y="3048892"/>
+            <a:ext cx="3560266" cy="223520"/>
+          </a:xfrm>
+          <a:prstGeom prst="rect">
+            <a:avLst/>
+          </a:prstGeom>
+          <a:noFill/>
+        </p:spPr>
+        <p:txBody>
+          <a:bodyPr wrap="none" lIns="0" rIns="0" tIns="0" bIns="0" anchor="t">
+            <a:spAutoFit/>
+          </a:bodyPr>
+          <a:lstStyle/>
+          <a:p>
+            <a:pPr algn="l">
+              <a:lnSpc>
+                <a:spcPct val="150000"/>
+              </a:lnSpc>
+            </a:pPr>
+            <a:r>
+              <a:rPr sz="1120" b="1" spc="16">
+                <a:solidFill>
+                  <a:srgbClr val="1D1D1F"/>
+                </a:solidFill>
+                <a:latin typeface="Helvetica Neue"/>
+              </a:rPr>
+              <a:t>What it improved</a:t>
+            </a:r>
+          </a:p>
+        </p:txBody>
+      </p:sp>
+      <p:sp>
+        <p:nvSpPr>
+          <p:cNvPr id="28" name="TextBox 27"/>
+          <p:cNvSpPr txBox="1"/>
+          <p:nvPr/>
+        </p:nvSpPr>
+        <p:spPr>
+          <a:xfrm>
+            <a:off x="8377733" y="3220342"/>
+            <a:ext cx="2260282" cy="185420"/>
+          </a:xfrm>
+          <a:prstGeom prst="rect">
+            <a:avLst/>
+          </a:prstGeom>
+          <a:noFill/>
+        </p:spPr>
+        <p:txBody>
+          <a:bodyPr wrap="none" lIns="0" rIns="0" tIns="0" bIns="0" anchor="t">
+            <a:spAutoFit/>
+          </a:bodyPr>
+          <a:lstStyle/>
+          <a:p>
+            <a:pPr algn="l">
+              <a:lnSpc>
+                <a:spcPct val="150000"/>
+              </a:lnSpc>
+            </a:pPr>
+            <a:r>
+              <a:rPr sz="1120" b="0">
+                <a:solidFill>
+                  <a:srgbClr val="B0B3BE"/>
+                </a:solidFill>
+                <a:latin typeface="Helvetica Neue"/>
+              </a:rPr>
+              <a:t>— fill in before the pitch</a:t>
+            </a:r>
+          </a:p>
+        </p:txBody>
+      </p:sp>
     </p:spTree>
   </p:cSld>
   <p:clrMapOvr>
@@ -3727,6 +6148,14 @@
 <file path=ppt/slides/slide3.xml><?xml version="1.0" encoding="utf-8"?>
 <p:sld xmlns:a="http://schemas.openxmlformats.org/drawingml/2006/main" xmlns:p="http://schemas.openxmlformats.org/presentationml/2006/main" xmlns:r="http://schemas.openxmlformats.org/officeDocument/2006/relationships">
   <p:cSld>
+    <p:bg>
+      <p:bgPr>
+        <a:solidFill>
+          <a:srgbClr val="FBFBFD"/>
+        </a:solidFill>
+        <a:effectLst/>
+      </p:bgPr>
+    </p:bg>
     <p:spTree>
       <p:nvGrpSpPr>
         <p:cNvPr id="1" name=""/>
@@ -3734,9 +6163,417 @@
         <p:nvPr/>
       </p:nvGrpSpPr>
       <p:grpSpPr/>
+      <p:sp>
+        <p:nvSpPr>
+          <p:cNvPr id="2" name="Rounded Rectangle 1"/>
+          <p:cNvSpPr/>
+          <p:nvPr/>
+        </p:nvSpPr>
+        <p:spPr>
+          <a:xfrm>
+            <a:off x="444500" y="1324967"/>
+            <a:ext cx="3475632" cy="4304407"/>
+          </a:xfrm>
+          <a:prstGeom prst="roundRect">
+            <a:avLst>
+              <a:gd name="adj" fmla="val 3654"/>
+            </a:avLst>
+          </a:prstGeom>
+          <a:solidFill>
+            <a:srgbClr val="FFFFFF"/>
+          </a:solidFill>
+          <a:ln w="9525">
+            <a:solidFill>
+              <a:srgbClr val="C9DCEE"/>
+            </a:solidFill>
+          </a:ln>
+          <a:effectLst/>
+        </p:spPr>
+        <p:style>
+          <a:lnRef idx="1">
+            <a:schemeClr val="accent1"/>
+          </a:lnRef>
+          <a:fillRef idx="3">
+            <a:schemeClr val="accent1"/>
+          </a:fillRef>
+          <a:effectRef idx="2">
+            <a:schemeClr val="accent1"/>
+          </a:effectRef>
+          <a:fontRef idx="minor">
+            <a:schemeClr val="lt1"/>
+          </a:fontRef>
+        </p:style>
+        <p:txBody>
+          <a:bodyPr rtlCol="0" anchor="ctr"/>
+          <a:lstStyle/>
+          <a:p>
+            <a:pPr algn="ctr"/>
+          </a:p>
+        </p:txBody>
+      </p:sp>
+      <p:sp>
+        <p:nvSpPr>
+          <p:cNvPr id="3" name="Rounded Rectangle 2"/>
+          <p:cNvSpPr/>
+          <p:nvPr/>
+        </p:nvSpPr>
+        <p:spPr>
+          <a:xfrm>
+            <a:off x="641350" y="1830685"/>
+            <a:ext cx="3081932" cy="425450"/>
+          </a:xfrm>
+          <a:prstGeom prst="roundRect">
+            <a:avLst>
+              <a:gd name="adj" fmla="val 0"/>
+            </a:avLst>
+          </a:prstGeom>
+          <a:noFill/>
+          <a:ln>
+            <a:noFill/>
+          </a:ln>
+          <a:effectLst/>
+        </p:spPr>
+        <p:style>
+          <a:lnRef idx="1">
+            <a:schemeClr val="accent1"/>
+          </a:lnRef>
+          <a:fillRef idx="3">
+            <a:schemeClr val="accent1"/>
+          </a:fillRef>
+          <a:effectRef idx="2">
+            <a:schemeClr val="accent1"/>
+          </a:effectRef>
+          <a:fontRef idx="minor">
+            <a:schemeClr val="lt1"/>
+          </a:fontRef>
+        </p:style>
+        <p:txBody>
+          <a:bodyPr rtlCol="0" anchor="ctr"/>
+          <a:lstStyle/>
+          <a:p>
+            <a:pPr algn="ctr"/>
+          </a:p>
+        </p:txBody>
+      </p:sp>
+      <p:sp>
+        <p:nvSpPr>
+          <p:cNvPr id="4" name="Rounded Rectangle 3"/>
+          <p:cNvSpPr/>
+          <p:nvPr/>
+        </p:nvSpPr>
+        <p:spPr>
+          <a:xfrm>
+            <a:off x="4358183" y="1324967"/>
+            <a:ext cx="3475632" cy="4304407"/>
+          </a:xfrm>
+          <a:prstGeom prst="roundRect">
+            <a:avLst>
+              <a:gd name="adj" fmla="val 3654"/>
+            </a:avLst>
+          </a:prstGeom>
+          <a:solidFill>
+            <a:srgbClr val="FFFFFF"/>
+          </a:solidFill>
+          <a:ln w="9525">
+            <a:solidFill>
+              <a:srgbClr val="E4E4EA"/>
+            </a:solidFill>
+          </a:ln>
+          <a:effectLst/>
+        </p:spPr>
+        <p:style>
+          <a:lnRef idx="1">
+            <a:schemeClr val="accent1"/>
+          </a:lnRef>
+          <a:fillRef idx="3">
+            <a:schemeClr val="accent1"/>
+          </a:fillRef>
+          <a:effectRef idx="2">
+            <a:schemeClr val="accent1"/>
+          </a:effectRef>
+          <a:fontRef idx="minor">
+            <a:schemeClr val="lt1"/>
+          </a:fontRef>
+        </p:style>
+        <p:txBody>
+          <a:bodyPr rtlCol="0" anchor="ctr"/>
+          <a:lstStyle/>
+          <a:p>
+            <a:pPr algn="ctr"/>
+          </a:p>
+        </p:txBody>
+      </p:sp>
+      <p:sp>
+        <p:nvSpPr>
+          <p:cNvPr id="5" name="Rounded Rectangle 4"/>
+          <p:cNvSpPr/>
+          <p:nvPr/>
+        </p:nvSpPr>
+        <p:spPr>
+          <a:xfrm>
+            <a:off x="4555033" y="1830685"/>
+            <a:ext cx="3081932" cy="425450"/>
+          </a:xfrm>
+          <a:prstGeom prst="roundRect">
+            <a:avLst>
+              <a:gd name="adj" fmla="val 0"/>
+            </a:avLst>
+          </a:prstGeom>
+          <a:noFill/>
+          <a:ln>
+            <a:noFill/>
+          </a:ln>
+          <a:effectLst/>
+        </p:spPr>
+        <p:style>
+          <a:lnRef idx="1">
+            <a:schemeClr val="accent1"/>
+          </a:lnRef>
+          <a:fillRef idx="3">
+            <a:schemeClr val="accent1"/>
+          </a:fillRef>
+          <a:effectRef idx="2">
+            <a:schemeClr val="accent1"/>
+          </a:effectRef>
+          <a:fontRef idx="minor">
+            <a:schemeClr val="lt1"/>
+          </a:fontRef>
+        </p:style>
+        <p:txBody>
+          <a:bodyPr rtlCol="0" anchor="ctr"/>
+          <a:lstStyle/>
+          <a:p>
+            <a:pPr algn="ctr"/>
+          </a:p>
+        </p:txBody>
+      </p:sp>
+      <p:sp>
+        <p:nvSpPr>
+          <p:cNvPr id="6" name="Rounded Rectangle 5"/>
+          <p:cNvSpPr/>
+          <p:nvPr/>
+        </p:nvSpPr>
+        <p:spPr>
+          <a:xfrm>
+            <a:off x="4555033" y="2338387"/>
+            <a:ext cx="3081932" cy="425450"/>
+          </a:xfrm>
+          <a:prstGeom prst="roundRect">
+            <a:avLst>
+              <a:gd name="adj" fmla="val 0"/>
+            </a:avLst>
+          </a:prstGeom>
+          <a:noFill/>
+          <a:ln>
+            <a:noFill/>
+          </a:ln>
+          <a:effectLst/>
+        </p:spPr>
+        <p:style>
+          <a:lnRef idx="1">
+            <a:schemeClr val="accent1"/>
+          </a:lnRef>
+          <a:fillRef idx="3">
+            <a:schemeClr val="accent1"/>
+          </a:fillRef>
+          <a:effectRef idx="2">
+            <a:schemeClr val="accent1"/>
+          </a:effectRef>
+          <a:fontRef idx="minor">
+            <a:schemeClr val="lt1"/>
+          </a:fontRef>
+        </p:style>
+        <p:txBody>
+          <a:bodyPr rtlCol="0" anchor="ctr"/>
+          <a:lstStyle/>
+          <a:p>
+            <a:pPr algn="ctr"/>
+          </a:p>
+        </p:txBody>
+      </p:sp>
+      <p:sp>
+        <p:nvSpPr>
+          <p:cNvPr id="7" name="Rounded Rectangle 6"/>
+          <p:cNvSpPr/>
+          <p:nvPr/>
+        </p:nvSpPr>
+        <p:spPr>
+          <a:xfrm>
+            <a:off x="8271867" y="1324967"/>
+            <a:ext cx="3475632" cy="4304407"/>
+          </a:xfrm>
+          <a:prstGeom prst="roundRect">
+            <a:avLst>
+              <a:gd name="adj" fmla="val 3654"/>
+            </a:avLst>
+          </a:prstGeom>
+          <a:solidFill>
+            <a:srgbClr val="FFFFFF"/>
+          </a:solidFill>
+          <a:ln w="9525">
+            <a:solidFill>
+              <a:srgbClr val="E4E4EA"/>
+            </a:solidFill>
+          </a:ln>
+          <a:effectLst/>
+        </p:spPr>
+        <p:style>
+          <a:lnRef idx="1">
+            <a:schemeClr val="accent1"/>
+          </a:lnRef>
+          <a:fillRef idx="3">
+            <a:schemeClr val="accent1"/>
+          </a:fillRef>
+          <a:effectRef idx="2">
+            <a:schemeClr val="accent1"/>
+          </a:effectRef>
+          <a:fontRef idx="minor">
+            <a:schemeClr val="lt1"/>
+          </a:fontRef>
+        </p:style>
+        <p:txBody>
+          <a:bodyPr rtlCol="0" anchor="ctr"/>
+          <a:lstStyle/>
+          <a:p>
+            <a:pPr algn="ctr"/>
+          </a:p>
+        </p:txBody>
+      </p:sp>
+      <p:sp>
+        <p:nvSpPr>
+          <p:cNvPr id="8" name="Rounded Rectangle 7"/>
+          <p:cNvSpPr/>
+          <p:nvPr/>
+        </p:nvSpPr>
+        <p:spPr>
+          <a:xfrm>
+            <a:off x="8468717" y="1830685"/>
+            <a:ext cx="3081932" cy="425450"/>
+          </a:xfrm>
+          <a:prstGeom prst="roundRect">
+            <a:avLst>
+              <a:gd name="adj" fmla="val 0"/>
+            </a:avLst>
+          </a:prstGeom>
+          <a:noFill/>
+          <a:ln>
+            <a:noFill/>
+          </a:ln>
+          <a:effectLst/>
+        </p:spPr>
+        <p:style>
+          <a:lnRef idx="1">
+            <a:schemeClr val="accent1"/>
+          </a:lnRef>
+          <a:fillRef idx="3">
+            <a:schemeClr val="accent1"/>
+          </a:fillRef>
+          <a:effectRef idx="2">
+            <a:schemeClr val="accent1"/>
+          </a:effectRef>
+          <a:fontRef idx="minor">
+            <a:schemeClr val="lt1"/>
+          </a:fontRef>
+        </p:style>
+        <p:txBody>
+          <a:bodyPr rtlCol="0" anchor="ctr"/>
+          <a:lstStyle/>
+          <a:p>
+            <a:pPr algn="ctr"/>
+          </a:p>
+        </p:txBody>
+      </p:sp>
+      <p:sp>
+        <p:nvSpPr>
+          <p:cNvPr id="9" name="Rounded Rectangle 8"/>
+          <p:cNvSpPr/>
+          <p:nvPr/>
+        </p:nvSpPr>
+        <p:spPr>
+          <a:xfrm>
+            <a:off x="8468717" y="2338387"/>
+            <a:ext cx="3081932" cy="425450"/>
+          </a:xfrm>
+          <a:prstGeom prst="roundRect">
+            <a:avLst>
+              <a:gd name="adj" fmla="val 0"/>
+            </a:avLst>
+          </a:prstGeom>
+          <a:noFill/>
+          <a:ln>
+            <a:noFill/>
+          </a:ln>
+          <a:effectLst/>
+        </p:spPr>
+        <p:style>
+          <a:lnRef idx="1">
+            <a:schemeClr val="accent1"/>
+          </a:lnRef>
+          <a:fillRef idx="3">
+            <a:schemeClr val="accent1"/>
+          </a:fillRef>
+          <a:effectRef idx="2">
+            <a:schemeClr val="accent1"/>
+          </a:effectRef>
+          <a:fontRef idx="minor">
+            <a:schemeClr val="lt1"/>
+          </a:fontRef>
+        </p:style>
+        <p:txBody>
+          <a:bodyPr rtlCol="0" anchor="ctr"/>
+          <a:lstStyle/>
+          <a:p>
+            <a:pPr algn="ctr"/>
+          </a:p>
+        </p:txBody>
+      </p:sp>
+      <p:sp>
+        <p:nvSpPr>
+          <p:cNvPr id="10" name="Rounded Rectangle 9"/>
+          <p:cNvSpPr/>
+          <p:nvPr/>
+        </p:nvSpPr>
+        <p:spPr>
+          <a:xfrm>
+            <a:off x="8468717" y="2846089"/>
+            <a:ext cx="3081932" cy="596900"/>
+          </a:xfrm>
+          <a:prstGeom prst="roundRect">
+            <a:avLst>
+              <a:gd name="adj" fmla="val 0"/>
+            </a:avLst>
+          </a:prstGeom>
+          <a:noFill/>
+          <a:ln>
+            <a:noFill/>
+          </a:ln>
+          <a:effectLst/>
+        </p:spPr>
+        <p:style>
+          <a:lnRef idx="1">
+            <a:schemeClr val="accent1"/>
+          </a:lnRef>
+          <a:fillRef idx="3">
+            <a:schemeClr val="accent1"/>
+          </a:fillRef>
+          <a:effectRef idx="2">
+            <a:schemeClr val="accent1"/>
+          </a:effectRef>
+          <a:fontRef idx="minor">
+            <a:schemeClr val="lt1"/>
+          </a:fontRef>
+        </p:style>
+        <p:txBody>
+          <a:bodyPr rtlCol="0" anchor="ctr"/>
+          <a:lstStyle/>
+          <a:p>
+            <a:pPr algn="ctr"/>
+          </a:p>
+        </p:txBody>
+      </p:sp>
       <p:pic>
         <p:nvPicPr>
-          <p:cNvPr id="2" name="Picture 1" descr="deck-3.png"/>
+          <p:cNvPr id="11" name="Picture 10" descr="deck-glyphs-3.png"/>
           <p:cNvPicPr>
             <a:picLocks noChangeAspect="1"/>
           </p:cNvPicPr>
@@ -3758,6 +6595,900 @@
           </a:prstGeom>
         </p:spPr>
       </p:pic>
+      <p:sp>
+        <p:nvSpPr>
+          <p:cNvPr id="12" name="TextBox 11"/>
+          <p:cNvSpPr txBox="1"/>
+          <p:nvPr/>
+        </p:nvSpPr>
+        <p:spPr>
+          <a:xfrm>
+            <a:off x="444500" y="288032"/>
+            <a:ext cx="11493500" cy="195579"/>
+          </a:xfrm>
+          <a:prstGeom prst="rect">
+            <a:avLst/>
+          </a:prstGeom>
+          <a:noFill/>
+        </p:spPr>
+        <p:txBody>
+          <a:bodyPr wrap="none" lIns="0" rIns="0" tIns="0" bIns="0" anchor="t">
+            <a:spAutoFit/>
+          </a:bodyPr>
+          <a:lstStyle/>
+          <a:p>
+            <a:pPr algn="l">
+              <a:lnSpc>
+                <a:spcPct val="150000"/>
+              </a:lnSpc>
+            </a:pPr>
+            <a:r>
+              <a:rPr sz="980" b="0" spc="308">
+                <a:solidFill>
+                  <a:srgbClr val="6E6E73"/>
+                </a:solidFill>
+                <a:latin typeface="Helvetica Neue"/>
+              </a:rPr>
+              <a:t>WHERE THIS GOES</a:t>
+            </a:r>
+          </a:p>
+        </p:txBody>
+      </p:sp>
+      <p:sp>
+        <p:nvSpPr>
+          <p:cNvPr id="13" name="TextBox 12"/>
+          <p:cNvSpPr txBox="1"/>
+          <p:nvPr/>
+        </p:nvSpPr>
+        <p:spPr>
+          <a:xfrm>
+            <a:off x="444500" y="524470"/>
+            <a:ext cx="11493500" cy="640794"/>
+          </a:xfrm>
+          <a:prstGeom prst="rect">
+            <a:avLst/>
+          </a:prstGeom>
+          <a:noFill/>
+        </p:spPr>
+        <p:txBody>
+          <a:bodyPr wrap="none" lIns="0" rIns="0" tIns="0" bIns="0" anchor="t">
+            <a:spAutoFit/>
+          </a:bodyPr>
+          <a:lstStyle/>
+          <a:p>
+            <a:pPr algn="l">
+              <a:lnSpc>
+                <a:spcPct val="104000"/>
+              </a:lnSpc>
+            </a:pPr>
+            <a:r>
+              <a:rPr sz="4060" b="1" spc="-145">
+                <a:solidFill>
+                  <a:srgbClr val="1D1D1F"/>
+                </a:solidFill>
+                <a:latin typeface="Helvetica Neue"/>
+              </a:rPr>
+              <a:t>Discord was the </a:t>
+            </a:r>
+            <a:r>
+              <a:rPr sz="4060" b="1" spc="-145">
+                <a:solidFill>
+                  <a:srgbClr val="0071E3"/>
+                </a:solidFill>
+                <a:latin typeface="Helvetica Neue"/>
+              </a:rPr>
+              <a:t>demo</a:t>
+            </a:r>
+            <a:r>
+              <a:rPr sz="4060" b="1" spc="-145">
+                <a:solidFill>
+                  <a:srgbClr val="1D1D1F"/>
+                </a:solidFill>
+                <a:latin typeface="Helvetica Neue"/>
+              </a:rPr>
+              <a:t>. Teams is the </a:t>
+            </a:r>
+            <a:r>
+              <a:rPr sz="4060" b="1" spc="-145">
+                <a:solidFill>
+                  <a:srgbClr val="0071E3"/>
+                </a:solidFill>
+                <a:latin typeface="Helvetica Neue"/>
+              </a:rPr>
+              <a:t>product</a:t>
+            </a:r>
+            <a:r>
+              <a:rPr sz="4060" b="1" spc="-145">
+                <a:solidFill>
+                  <a:srgbClr val="1D1D1F"/>
+                </a:solidFill>
+                <a:latin typeface="Helvetica Neue"/>
+              </a:rPr>
+              <a:t>.</a:t>
+            </a:r>
+          </a:p>
+        </p:txBody>
+      </p:sp>
+      <p:sp>
+        <p:nvSpPr>
+          <p:cNvPr id="14" name="TextBox 13"/>
+          <p:cNvSpPr txBox="1"/>
+          <p:nvPr/>
+        </p:nvSpPr>
+        <p:spPr>
+          <a:xfrm>
+            <a:off x="444500" y="974129"/>
+            <a:ext cx="11493500" cy="293370"/>
+          </a:xfrm>
+          <a:prstGeom prst="rect">
+            <a:avLst/>
+          </a:prstGeom>
+          <a:noFill/>
+        </p:spPr>
+        <p:txBody>
+          <a:bodyPr wrap="none" lIns="0" rIns="0" tIns="0" bIns="0" anchor="t">
+            <a:spAutoFit/>
+          </a:bodyPr>
+          <a:lstStyle/>
+          <a:p>
+            <a:pPr algn="l">
+              <a:lnSpc>
+                <a:spcPct val="150000"/>
+              </a:lnSpc>
+            </a:pPr>
+            <a:r>
+              <a:rPr sz="1470" b="0">
+                <a:solidFill>
+                  <a:srgbClr val="6E6E73"/>
+                </a:solidFill>
+                <a:latin typeface="Helvetica Neue"/>
+              </a:rPr>
+              <a:t>One container knows what a voice call is. Everything else already doesn't care.</a:t>
+            </a:r>
+          </a:p>
+        </p:txBody>
+      </p:sp>
+      <p:sp>
+        <p:nvSpPr>
+          <p:cNvPr id="15" name="TextBox 14"/>
+          <p:cNvSpPr txBox="1"/>
+          <p:nvPr/>
+        </p:nvSpPr>
+        <p:spPr>
+          <a:xfrm>
+            <a:off x="641350" y="1523305"/>
+            <a:ext cx="6046172" cy="209550"/>
+          </a:xfrm>
+          <a:prstGeom prst="rect">
+            <a:avLst/>
+          </a:prstGeom>
+          <a:noFill/>
+        </p:spPr>
+        <p:txBody>
+          <a:bodyPr wrap="none" lIns="0" rIns="0" tIns="0" bIns="0" anchor="t">
+            <a:spAutoFit/>
+          </a:bodyPr>
+          <a:lstStyle/>
+          <a:p>
+            <a:pPr algn="l">
+              <a:lnSpc>
+                <a:spcPct val="150000"/>
+              </a:lnSpc>
+            </a:pPr>
+            <a:r>
+              <a:rPr sz="1050" b="0" spc="300">
+                <a:solidFill>
+                  <a:srgbClr val="087443"/>
+                </a:solidFill>
+                <a:latin typeface="Helvetica Neue"/>
+              </a:rPr>
+              <a:t>NOW</a:t>
+            </a:r>
+          </a:p>
+        </p:txBody>
+      </p:sp>
+      <p:sp>
+        <p:nvSpPr>
+          <p:cNvPr id="16" name="TextBox 15"/>
+          <p:cNvSpPr txBox="1"/>
+          <p:nvPr/>
+        </p:nvSpPr>
+        <p:spPr>
+          <a:xfrm>
+            <a:off x="1085850" y="1830685"/>
+            <a:ext cx="1744255" cy="363220"/>
+          </a:xfrm>
+          <a:prstGeom prst="rect">
+            <a:avLst/>
+          </a:prstGeom>
+          <a:noFill/>
+        </p:spPr>
+        <p:txBody>
+          <a:bodyPr wrap="none" lIns="0" rIns="0" tIns="0" bIns="0" anchor="t">
+            <a:spAutoFit/>
+          </a:bodyPr>
+          <a:lstStyle/>
+          <a:p>
+            <a:pPr algn="l">
+              <a:lnSpc>
+                <a:spcPct val="150000"/>
+              </a:lnSpc>
+            </a:pPr>
+            <a:r>
+              <a:rPr sz="1820" b="1" spc="-26">
+                <a:solidFill>
+                  <a:srgbClr val="1D1D1F"/>
+                </a:solidFill>
+                <a:latin typeface="Helvetica Neue"/>
+              </a:rPr>
+              <a:t>Discord</a:t>
+            </a:r>
+          </a:p>
+        </p:txBody>
+      </p:sp>
+      <p:sp>
+        <p:nvSpPr>
+          <p:cNvPr id="17" name="TextBox 16"/>
+          <p:cNvSpPr txBox="1"/>
+          <p:nvPr/>
+        </p:nvSpPr>
+        <p:spPr>
+          <a:xfrm>
+            <a:off x="1085850" y="2084685"/>
+            <a:ext cx="1642655" cy="251460"/>
+          </a:xfrm>
+          <a:prstGeom prst="rect">
+            <a:avLst/>
+          </a:prstGeom>
+          <a:noFill/>
+        </p:spPr>
+        <p:txBody>
+          <a:bodyPr wrap="none" lIns="0" rIns="0" tIns="0" bIns="0" anchor="t">
+            <a:spAutoFit/>
+          </a:bodyPr>
+          <a:lstStyle/>
+          <a:p>
+            <a:pPr algn="l">
+              <a:lnSpc>
+                <a:spcPct val="150000"/>
+              </a:lnSpc>
+            </a:pPr>
+            <a:r>
+              <a:rPr sz="1260" b="0" spc="36">
+                <a:solidFill>
+                  <a:srgbClr val="6E6E73"/>
+                </a:solidFill>
+                <a:latin typeface="Helvetica Neue"/>
+              </a:rPr>
+              <a:t>one room, live</a:t>
+            </a:r>
+          </a:p>
+        </p:txBody>
+      </p:sp>
+      <p:sp>
+        <p:nvSpPr>
+          <p:cNvPr id="18" name="TextBox 17"/>
+          <p:cNvSpPr txBox="1"/>
+          <p:nvPr/>
+        </p:nvSpPr>
+        <p:spPr>
+          <a:xfrm>
+            <a:off x="4034432" y="3362821"/>
+            <a:ext cx="855156" cy="388620"/>
+          </a:xfrm>
+          <a:prstGeom prst="rect">
+            <a:avLst/>
+          </a:prstGeom>
+          <a:noFill/>
+        </p:spPr>
+        <p:txBody>
+          <a:bodyPr wrap="none" lIns="0" rIns="0" tIns="0" bIns="0" anchor="t">
+            <a:spAutoFit/>
+          </a:bodyPr>
+          <a:lstStyle/>
+          <a:p>
+            <a:pPr algn="l">
+              <a:lnSpc>
+                <a:spcPct val="100000"/>
+              </a:lnSpc>
+            </a:pPr>
+            <a:r>
+              <a:rPr sz="2520" b="0">
+                <a:solidFill>
+                  <a:srgbClr val="C2C6D2"/>
+                </a:solidFill>
+                <a:latin typeface="Helvetica Neue"/>
+              </a:rPr>
+              <a:t>→</a:t>
+            </a:r>
+          </a:p>
+        </p:txBody>
+      </p:sp>
+      <p:sp>
+        <p:nvSpPr>
+          <p:cNvPr id="19" name="TextBox 18"/>
+          <p:cNvSpPr txBox="1"/>
+          <p:nvPr/>
+        </p:nvSpPr>
+        <p:spPr>
+          <a:xfrm>
+            <a:off x="4555033" y="1523305"/>
+            <a:ext cx="6046172" cy="209550"/>
+          </a:xfrm>
+          <a:prstGeom prst="rect">
+            <a:avLst/>
+          </a:prstGeom>
+          <a:noFill/>
+        </p:spPr>
+        <p:txBody>
+          <a:bodyPr wrap="none" lIns="0" rIns="0" tIns="0" bIns="0" anchor="t">
+            <a:spAutoFit/>
+          </a:bodyPr>
+          <a:lstStyle/>
+          <a:p>
+            <a:pPr algn="l">
+              <a:lnSpc>
+                <a:spcPct val="150000"/>
+              </a:lnSpc>
+            </a:pPr>
+            <a:r>
+              <a:rPr sz="1050" b="0" spc="300">
+                <a:solidFill>
+                  <a:srgbClr val="0071E3"/>
+                </a:solidFill>
+                <a:latin typeface="Helvetica Neue"/>
+              </a:rPr>
+              <a:t>NEXT</a:t>
+            </a:r>
+          </a:p>
+        </p:txBody>
+      </p:sp>
+      <p:sp>
+        <p:nvSpPr>
+          <p:cNvPr id="20" name="TextBox 19"/>
+          <p:cNvSpPr txBox="1"/>
+          <p:nvPr/>
+        </p:nvSpPr>
+        <p:spPr>
+          <a:xfrm>
+            <a:off x="4999533" y="1830685"/>
+            <a:ext cx="2115065" cy="363220"/>
+          </a:xfrm>
+          <a:prstGeom prst="rect">
+            <a:avLst/>
+          </a:prstGeom>
+          <a:noFill/>
+        </p:spPr>
+        <p:txBody>
+          <a:bodyPr wrap="none" lIns="0" rIns="0" tIns="0" bIns="0" anchor="t">
+            <a:spAutoFit/>
+          </a:bodyPr>
+          <a:lstStyle/>
+          <a:p>
+            <a:pPr algn="l">
+              <a:lnSpc>
+                <a:spcPct val="150000"/>
+              </a:lnSpc>
+            </a:pPr>
+            <a:r>
+              <a:rPr sz="1820" b="1" spc="-26">
+                <a:solidFill>
+                  <a:srgbClr val="1D1D1F"/>
+                </a:solidFill>
+                <a:latin typeface="Helvetica Neue"/>
+              </a:rPr>
+              <a:t>Google Meet</a:t>
+            </a:r>
+          </a:p>
+        </p:txBody>
+      </p:sp>
+      <p:sp>
+        <p:nvSpPr>
+          <p:cNvPr id="21" name="TextBox 20"/>
+          <p:cNvSpPr txBox="1"/>
+          <p:nvPr/>
+        </p:nvSpPr>
+        <p:spPr>
+          <a:xfrm>
+            <a:off x="4999533" y="2084685"/>
+            <a:ext cx="2013465" cy="251460"/>
+          </a:xfrm>
+          <a:prstGeom prst="rect">
+            <a:avLst/>
+          </a:prstGeom>
+          <a:noFill/>
+        </p:spPr>
+        <p:txBody>
+          <a:bodyPr wrap="none" lIns="0" rIns="0" tIns="0" bIns="0" anchor="t">
+            <a:spAutoFit/>
+          </a:bodyPr>
+          <a:lstStyle/>
+          <a:p>
+            <a:pPr algn="l">
+              <a:lnSpc>
+                <a:spcPct val="150000"/>
+              </a:lnSpc>
+            </a:pPr>
+            <a:r>
+              <a:rPr sz="1260" b="0" spc="36">
+                <a:solidFill>
+                  <a:srgbClr val="6E6E73"/>
+                </a:solidFill>
+                <a:latin typeface="Helvetica Neue"/>
+              </a:rPr>
+              <a:t>adapter</a:t>
+            </a:r>
+          </a:p>
+        </p:txBody>
+      </p:sp>
+      <p:sp>
+        <p:nvSpPr>
+          <p:cNvPr id="22" name="TextBox 21"/>
+          <p:cNvSpPr txBox="1"/>
+          <p:nvPr/>
+        </p:nvSpPr>
+        <p:spPr>
+          <a:xfrm>
+            <a:off x="4999533" y="2338387"/>
+            <a:ext cx="1142702" cy="363220"/>
+          </a:xfrm>
+          <a:prstGeom prst="rect">
+            <a:avLst/>
+          </a:prstGeom>
+          <a:noFill/>
+        </p:spPr>
+        <p:txBody>
+          <a:bodyPr wrap="none" lIns="0" rIns="0" tIns="0" bIns="0" anchor="t">
+            <a:spAutoFit/>
+          </a:bodyPr>
+          <a:lstStyle/>
+          <a:p>
+            <a:pPr algn="l">
+              <a:lnSpc>
+                <a:spcPct val="150000"/>
+              </a:lnSpc>
+            </a:pPr>
+            <a:r>
+              <a:rPr sz="1820" b="1" spc="-26">
+                <a:solidFill>
+                  <a:srgbClr val="1D1D1F"/>
+                </a:solidFill>
+                <a:latin typeface="Helvetica Neue"/>
+              </a:rPr>
+              <a:t>Zoom</a:t>
+            </a:r>
+          </a:p>
+        </p:txBody>
+      </p:sp>
+      <p:sp>
+        <p:nvSpPr>
+          <p:cNvPr id="23" name="TextBox 22"/>
+          <p:cNvSpPr txBox="1"/>
+          <p:nvPr/>
+        </p:nvSpPr>
+        <p:spPr>
+          <a:xfrm>
+            <a:off x="4999533" y="2592387"/>
+            <a:ext cx="1041102" cy="251460"/>
+          </a:xfrm>
+          <a:prstGeom prst="rect">
+            <a:avLst/>
+          </a:prstGeom>
+          <a:noFill/>
+        </p:spPr>
+        <p:txBody>
+          <a:bodyPr wrap="none" lIns="0" rIns="0" tIns="0" bIns="0" anchor="t">
+            <a:spAutoFit/>
+          </a:bodyPr>
+          <a:lstStyle/>
+          <a:p>
+            <a:pPr algn="l">
+              <a:lnSpc>
+                <a:spcPct val="150000"/>
+              </a:lnSpc>
+            </a:pPr>
+            <a:r>
+              <a:rPr sz="1260" b="0" spc="36">
+                <a:solidFill>
+                  <a:srgbClr val="6E6E73"/>
+                </a:solidFill>
+                <a:latin typeface="Helvetica Neue"/>
+              </a:rPr>
+              <a:t>adapter</a:t>
+            </a:r>
+          </a:p>
+        </p:txBody>
+      </p:sp>
+      <p:sp>
+        <p:nvSpPr>
+          <p:cNvPr id="24" name="TextBox 23"/>
+          <p:cNvSpPr txBox="1"/>
+          <p:nvPr/>
+        </p:nvSpPr>
+        <p:spPr>
+          <a:xfrm>
+            <a:off x="7948116" y="3362821"/>
+            <a:ext cx="855156" cy="388620"/>
+          </a:xfrm>
+          <a:prstGeom prst="rect">
+            <a:avLst/>
+          </a:prstGeom>
+          <a:noFill/>
+        </p:spPr>
+        <p:txBody>
+          <a:bodyPr wrap="none" lIns="0" rIns="0" tIns="0" bIns="0" anchor="t">
+            <a:spAutoFit/>
+          </a:bodyPr>
+          <a:lstStyle/>
+          <a:p>
+            <a:pPr algn="l">
+              <a:lnSpc>
+                <a:spcPct val="100000"/>
+              </a:lnSpc>
+            </a:pPr>
+            <a:r>
+              <a:rPr sz="2520" b="0">
+                <a:solidFill>
+                  <a:srgbClr val="C2C6D2"/>
+                </a:solidFill>
+                <a:latin typeface="Helvetica Neue"/>
+              </a:rPr>
+              <a:t>→</a:t>
+            </a:r>
+          </a:p>
+        </p:txBody>
+      </p:sp>
+      <p:sp>
+        <p:nvSpPr>
+          <p:cNvPr id="25" name="TextBox 24"/>
+          <p:cNvSpPr txBox="1"/>
+          <p:nvPr/>
+        </p:nvSpPr>
+        <p:spPr>
+          <a:xfrm>
+            <a:off x="8468717" y="1523305"/>
+            <a:ext cx="3469282" cy="209550"/>
+          </a:xfrm>
+          <a:prstGeom prst="rect">
+            <a:avLst/>
+          </a:prstGeom>
+          <a:noFill/>
+        </p:spPr>
+        <p:txBody>
+          <a:bodyPr wrap="none" lIns="0" rIns="0" tIns="0" bIns="0" anchor="t">
+            <a:spAutoFit/>
+          </a:bodyPr>
+          <a:lstStyle/>
+          <a:p>
+            <a:pPr algn="l">
+              <a:lnSpc>
+                <a:spcPct val="150000"/>
+              </a:lnSpc>
+            </a:pPr>
+            <a:r>
+              <a:rPr sz="1050" b="0" spc="300">
+                <a:solidFill>
+                  <a:srgbClr val="B25000"/>
+                </a:solidFill>
+                <a:latin typeface="Helvetica Neue"/>
+              </a:rPr>
+              <a:t>THEN</a:t>
+            </a:r>
+          </a:p>
+        </p:txBody>
+      </p:sp>
+      <p:sp>
+        <p:nvSpPr>
+          <p:cNvPr id="26" name="TextBox 25"/>
+          <p:cNvSpPr txBox="1"/>
+          <p:nvPr/>
+        </p:nvSpPr>
+        <p:spPr>
+          <a:xfrm>
+            <a:off x="8913217" y="1830685"/>
+            <a:ext cx="2641778" cy="363220"/>
+          </a:xfrm>
+          <a:prstGeom prst="rect">
+            <a:avLst/>
+          </a:prstGeom>
+          <a:noFill/>
+        </p:spPr>
+        <p:txBody>
+          <a:bodyPr wrap="none" lIns="0" rIns="0" tIns="0" bIns="0" anchor="t">
+            <a:spAutoFit/>
+          </a:bodyPr>
+          <a:lstStyle/>
+          <a:p>
+            <a:pPr algn="l">
+              <a:lnSpc>
+                <a:spcPct val="150000"/>
+              </a:lnSpc>
+            </a:pPr>
+            <a:r>
+              <a:rPr sz="1820" b="1" spc="-26">
+                <a:solidFill>
+                  <a:srgbClr val="1D1D1F"/>
+                </a:solidFill>
+                <a:latin typeface="Helvetica Neue"/>
+              </a:rPr>
+              <a:t>Microsoft Teams</a:t>
+            </a:r>
+          </a:p>
+        </p:txBody>
+      </p:sp>
+      <p:sp>
+        <p:nvSpPr>
+          <p:cNvPr id="27" name="TextBox 26"/>
+          <p:cNvSpPr txBox="1"/>
+          <p:nvPr/>
+        </p:nvSpPr>
+        <p:spPr>
+          <a:xfrm>
+            <a:off x="8913217" y="2084685"/>
+            <a:ext cx="2540178" cy="251460"/>
+          </a:xfrm>
+          <a:prstGeom prst="rect">
+            <a:avLst/>
+          </a:prstGeom>
+          <a:noFill/>
+        </p:spPr>
+        <p:txBody>
+          <a:bodyPr wrap="none" lIns="0" rIns="0" tIns="0" bIns="0" anchor="t">
+            <a:spAutoFit/>
+          </a:bodyPr>
+          <a:lstStyle/>
+          <a:p>
+            <a:pPr algn="l">
+              <a:lnSpc>
+                <a:spcPct val="150000"/>
+              </a:lnSpc>
+            </a:pPr>
+            <a:r>
+              <a:rPr sz="1260" b="0" spc="36">
+                <a:solidFill>
+                  <a:srgbClr val="6E6E73"/>
+                </a:solidFill>
+                <a:latin typeface="Helvetica Neue"/>
+              </a:rPr>
+              <a:t>enterprise add-on</a:t>
+            </a:r>
+          </a:p>
+        </p:txBody>
+      </p:sp>
+      <p:sp>
+        <p:nvSpPr>
+          <p:cNvPr id="28" name="TextBox 27"/>
+          <p:cNvSpPr txBox="1"/>
+          <p:nvPr/>
+        </p:nvSpPr>
+        <p:spPr>
+          <a:xfrm>
+            <a:off x="8913217" y="2338387"/>
+            <a:ext cx="3024782" cy="363220"/>
+          </a:xfrm>
+          <a:prstGeom prst="rect">
+            <a:avLst/>
+          </a:prstGeom>
+          <a:noFill/>
+        </p:spPr>
+        <p:txBody>
+          <a:bodyPr wrap="none" lIns="0" rIns="0" tIns="0" bIns="0" anchor="t">
+            <a:spAutoFit/>
+          </a:bodyPr>
+          <a:lstStyle/>
+          <a:p>
+            <a:pPr algn="l">
+              <a:lnSpc>
+                <a:spcPct val="150000"/>
+              </a:lnSpc>
+            </a:pPr>
+            <a:r>
+              <a:rPr sz="1820" b="1" spc="-26">
+                <a:solidFill>
+                  <a:srgbClr val="1D1D1F"/>
+                </a:solidFill>
+                <a:latin typeface="Helvetica Neue"/>
+              </a:rPr>
+              <a:t>Company rules</a:t>
+            </a:r>
+          </a:p>
+        </p:txBody>
+      </p:sp>
+      <p:sp>
+        <p:nvSpPr>
+          <p:cNvPr id="29" name="TextBox 28"/>
+          <p:cNvSpPr txBox="1"/>
+          <p:nvPr/>
+        </p:nvSpPr>
+        <p:spPr>
+          <a:xfrm>
+            <a:off x="8913217" y="2592387"/>
+            <a:ext cx="3024782" cy="251460"/>
+          </a:xfrm>
+          <a:prstGeom prst="rect">
+            <a:avLst/>
+          </a:prstGeom>
+          <a:noFill/>
+        </p:spPr>
+        <p:txBody>
+          <a:bodyPr wrap="none" lIns="0" rIns="0" tIns="0" bIns="0" anchor="t">
+            <a:spAutoFit/>
+          </a:bodyPr>
+          <a:lstStyle/>
+          <a:p>
+            <a:pPr algn="l">
+              <a:lnSpc>
+                <a:spcPct val="150000"/>
+              </a:lnSpc>
+            </a:pPr>
+            <a:r>
+              <a:rPr sz="1260" b="0" spc="36">
+                <a:solidFill>
+                  <a:srgbClr val="6E6E73"/>
+                </a:solidFill>
+                <a:latin typeface="Helvetica Neue"/>
+              </a:rPr>
+              <a:t>set once, enforced in every meeting</a:t>
+            </a:r>
+          </a:p>
+        </p:txBody>
+      </p:sp>
+      <p:sp>
+        <p:nvSpPr>
+          <p:cNvPr id="30" name="TextBox 29"/>
+          <p:cNvSpPr txBox="1"/>
+          <p:nvPr/>
+        </p:nvSpPr>
+        <p:spPr>
+          <a:xfrm>
+            <a:off x="8913217" y="2846089"/>
+            <a:ext cx="3024782" cy="363220"/>
+          </a:xfrm>
+          <a:prstGeom prst="rect">
+            <a:avLst/>
+          </a:prstGeom>
+          <a:noFill/>
+        </p:spPr>
+        <p:txBody>
+          <a:bodyPr wrap="none" lIns="0" rIns="0" tIns="0" bIns="0" anchor="t">
+            <a:spAutoFit/>
+          </a:bodyPr>
+          <a:lstStyle/>
+          <a:p>
+            <a:pPr algn="l">
+              <a:lnSpc>
+                <a:spcPct val="150000"/>
+              </a:lnSpc>
+            </a:pPr>
+            <a:r>
+              <a:rPr sz="1820" b="1" spc="-26">
+                <a:solidFill>
+                  <a:srgbClr val="1D1D1F"/>
+                </a:solidFill>
+                <a:latin typeface="Helvetica Neue"/>
+              </a:rPr>
+              <a:t>Hand-off plugin</a:t>
+            </a:r>
+          </a:p>
+        </p:txBody>
+      </p:sp>
+      <p:sp>
+        <p:nvSpPr>
+          <p:cNvPr id="31" name="TextBox 30"/>
+          <p:cNvSpPr txBox="1"/>
+          <p:nvPr/>
+        </p:nvSpPr>
+        <p:spPr>
+          <a:xfrm>
+            <a:off x="8913217" y="3100089"/>
+            <a:ext cx="2971530" cy="422909"/>
+          </a:xfrm>
+          <a:prstGeom prst="rect">
+            <a:avLst/>
+          </a:prstGeom>
+          <a:noFill/>
+        </p:spPr>
+        <p:txBody>
+          <a:bodyPr wrap="square" lIns="0" rIns="0" tIns="0" bIns="0" anchor="t">
+            <a:spAutoFit/>
+          </a:bodyPr>
+          <a:lstStyle/>
+          <a:p>
+            <a:pPr algn="l">
+              <a:lnSpc>
+                <a:spcPct val="150000"/>
+              </a:lnSpc>
+            </a:pPr>
+            <a:r>
+              <a:rPr sz="1260" b="0" spc="36">
+                <a:solidFill>
+                  <a:srgbClr val="6E6E73"/>
+                </a:solidFill>
+                <a:latin typeface="Helvetica Neue"/>
+              </a:rPr>
+              <a:t>transcript, decisions and open items into the team's own knowledge agent</a:t>
+            </a:r>
+          </a:p>
+        </p:txBody>
+      </p:sp>
+      <p:sp>
+        <p:nvSpPr>
+          <p:cNvPr id="32" name="TextBox 31"/>
+          <p:cNvSpPr txBox="1"/>
+          <p:nvPr/>
+        </p:nvSpPr>
+        <p:spPr>
+          <a:xfrm>
+            <a:off x="444500" y="5791894"/>
+            <a:ext cx="2520424" cy="284480"/>
+          </a:xfrm>
+          <a:prstGeom prst="rect">
+            <a:avLst/>
+          </a:prstGeom>
+          <a:noFill/>
+        </p:spPr>
+        <p:txBody>
+          <a:bodyPr wrap="none" lIns="0" rIns="0" tIns="0" bIns="0" anchor="t">
+            <a:spAutoFit/>
+          </a:bodyPr>
+          <a:lstStyle/>
+          <a:p>
+            <a:pPr algn="l">
+              <a:lnSpc>
+                <a:spcPct val="150000"/>
+              </a:lnSpc>
+            </a:pPr>
+            <a:r>
+              <a:rPr sz="1680" b="1" spc="-24">
+                <a:solidFill>
+                  <a:srgbClr val="0071E3"/>
+                </a:solidFill>
+                <a:latin typeface="Helvetica Neue"/>
+              </a:rPr>
+              <a:t>Time governance</a:t>
+            </a:r>
+          </a:p>
+        </p:txBody>
+      </p:sp>
+      <p:sp>
+        <p:nvSpPr>
+          <p:cNvPr id="33" name="TextBox 32"/>
+          <p:cNvSpPr txBox="1"/>
+          <p:nvPr/>
+        </p:nvSpPr>
+        <p:spPr>
+          <a:xfrm>
+            <a:off x="444500" y="6035079"/>
+            <a:ext cx="11493500" cy="422909"/>
+          </a:xfrm>
+          <a:prstGeom prst="rect">
+            <a:avLst/>
+          </a:prstGeom>
+          <a:noFill/>
+        </p:spPr>
+        <p:txBody>
+          <a:bodyPr wrap="square" lIns="0" rIns="0" tIns="0" bIns="0" anchor="t">
+            <a:spAutoFit/>
+          </a:bodyPr>
+          <a:lstStyle/>
+          <a:p>
+            <a:pPr algn="l">
+              <a:lnSpc>
+                <a:spcPct val="150000"/>
+              </a:lnSpc>
+            </a:pPr>
+            <a:r>
+              <a:rPr sz="1260" b="0" spc="-24">
+                <a:solidFill>
+                  <a:srgbClr val="6E6E73"/>
+                </a:solidFill>
+                <a:latin typeface="Helvetica Neue"/>
+              </a:rPr>
+              <a:t>Notes tell you what happened. Karen changes what happens — inside the hour. At enterprise scale the rules stop being per-meeting: no agenda, no booking, and how hard she chairs is set company-wide, not by whoever called the meeting. And what the meeting produced does not stop at the call: the transcript, the decisions and the open items are handed to whatever agent already keeps the company's knowledge.</a:t>
+            </a:r>
+          </a:p>
+        </p:txBody>
+      </p:sp>
     </p:spTree>
   </p:cSld>
   <p:clrMapOvr>
